--- a/presentation/rtc_chat_project.pptx
+++ b/presentation/rtc_chat_project.pptx
@@ -1,37 +1,147 @@
 
 <file path=ppt/presentation.xml><?xml version="1.0" encoding="utf-8"?>
-<p:presentation xmlns:a="http://schemas.openxmlformats.org/drawingml/2006/main" xmlns:r="http://schemas.openxmlformats.org/officeDocument/2006/relationships" xmlns:p="http://schemas.openxmlformats.org/presentationml/2006/main">
+<p:presentation xmlns:a="http://schemas.openxmlformats.org/drawingml/2006/main" xmlns:p="http://schemas.openxmlformats.org/presentationml/2006/main" xmlns:r="http://schemas.openxmlformats.org/officeDocument/2006/relationships" xmlns:p14="http://schemas.microsoft.com/office/powerpoint/2010/main" xmlns:p15="http://schemas.microsoft.com/office/powerpoint/2012/main" xmlns:mc="http://schemas.openxmlformats.org/markup-compatibility/2006">
   <p:sldMasterIdLst>
-    <p:sldMasterId id="2147483648" r:id="rId1"/>
+    <p:sldMasterId id="2147483648" r:id="rId2"/>
   </p:sldMasterIdLst>
   <p:sldIdLst>
-    <p:sldId id="256" r:id="rId2"/>
-    <p:sldId id="257" r:id="rId3"/>
-    <p:sldId id="258" r:id="rId4"/>
-    <p:sldId id="259" r:id="rId5"/>
-    <p:sldId id="260" r:id="rId6"/>
-    <p:sldId id="261" r:id="rId7"/>
-    <p:sldId id="262" r:id="rId8"/>
-    <p:sldId id="263" r:id="rId9"/>
-    <p:sldId id="264" r:id="rId10"/>
-    <p:sldId id="265" r:id="rId11"/>
-    <p:sldId id="266" r:id="rId12"/>
-    <p:sldId id="267" r:id="rId13"/>
-    <p:sldId id="268" r:id="rId14"/>
-    <p:sldId id="269" r:id="rId15"/>
-    <p:sldId id="270" r:id="rId16"/>
-    <p:sldId id="271" r:id="rId17"/>
-    <p:sldId id="272" r:id="rId18"/>
-    <p:sldId id="273" r:id="rId19"/>
+    <p:sldId id="256" r:id="rId3"/>
+    <p:sldId id="257" r:id="rId4"/>
+    <p:sldId id="258" r:id="rId5"/>
+    <p:sldId id="259" r:id="rId6"/>
+    <p:sldId id="260" r:id="rId7"/>
+    <p:sldId id="261" r:id="rId8"/>
+    <p:sldId id="262" r:id="rId9"/>
+    <p:sldId id="263" r:id="rId10"/>
+    <p:sldId id="264" r:id="rId11"/>
+    <p:sldId id="265" r:id="rId12"/>
+    <p:sldId id="266" r:id="rId13"/>
+    <p:sldId id="267" r:id="rId14"/>
+    <p:sldId id="268" r:id="rId15"/>
+    <p:sldId id="269" r:id="rId16"/>
+    <p:sldId id="270" r:id="rId17"/>
+    <p:sldId id="271" r:id="rId18"/>
+    <p:sldId id="272" r:id="rId19"/>
+    <p:sldId id="273" r:id="rId20"/>
+    <p:sldId id="274" r:id="rId21"/>
   </p:sldIdLst>
-  <p:sldSz cx="12192000" cy="6858000" type="screen16x9"/>
-  <p:notesSz cx="6858000" cy="9144000"/>
+  <p:sldSz cx="12192000" cy="6858000"/>
+  <p:notesSz cx="7559675" cy="10691813"/>
 </p:presentation>
 </file>
 
 <file path=ppt/slideLayouts/slideLayout1.xml><?xml version="1.0" encoding="utf-8"?>
-<p:sldLayout xmlns:a="http://schemas.openxmlformats.org/drawingml/2006/main" xmlns:r="http://schemas.openxmlformats.org/officeDocument/2006/relationships" xmlns:p="http://schemas.openxmlformats.org/presentationml/2006/main" type="titleAndBody" preserve="1">
-  <p:cSld>
+<p:sldLayout xmlns:a="http://schemas.openxmlformats.org/drawingml/2006/main" xmlns:p="http://schemas.openxmlformats.org/presentationml/2006/main" xmlns:r="http://schemas.openxmlformats.org/officeDocument/2006/relationships" xmlns:p14="http://schemas.microsoft.com/office/powerpoint/2010/main" xmlns:p15="http://schemas.microsoft.com/office/powerpoint/2012/main" xmlns:mc="http://schemas.openxmlformats.org/markup-compatibility/2006" type="tx" preserve="1">
+  <p:cSld name="Default">
+    <p:spTree>
+      <p:nvGrpSpPr>
+        <p:cNvPr id="1" name=""/>
+        <p:cNvGrpSpPr/>
+        <p:nvPr/>
+      </p:nvGrpSpPr>
+      <p:grpSpPr>
+        <a:xfrm>
+          <a:off x="0" y="0"/>
+          <a:ext cx="0" cy="0"/>
+          <a:chOff x="0" y="0"/>
+          <a:chExt cx="0" cy="0"/>
+        </a:xfrm>
+      </p:grpSpPr>
+      <p:sp>
+        <p:nvSpPr>
+          <p:cNvPr id="4" name="PlaceHolder 1"/>
+          <p:cNvSpPr>
+            <a:spLocks noGrp="1"/>
+          </p:cNvSpPr>
+          <p:nvPr>
+            <p:ph type="title"/>
+          </p:nvPr>
+        </p:nvSpPr>
+        <p:spPr>
+          <a:xfrm>
+            <a:off x="609480" y="273600"/>
+            <a:ext cx="10972440" cy="1144800"/>
+          </a:xfrm>
+          <a:prstGeom prst="rect">
+            <a:avLst/>
+          </a:prstGeom>
+          <a:noFill/>
+          <a:ln w="0">
+            <a:noFill/>
+          </a:ln>
+        </p:spPr>
+        <p:txBody>
+          <a:bodyPr lIns="0" rIns="0" tIns="0" bIns="0" anchor="ctr">
+            <a:spAutoFit/>
+          </a:bodyPr>
+          <a:p>
+            <a:pPr indent="0" algn="ctr">
+              <a:buNone/>
+            </a:pPr>
+            <a:endParaRPr lang="en-GB" sz="1800" b="0" u="none" strike="noStrike">
+              <a:solidFill>
+                <a:srgbClr val="000000"/>
+              </a:solidFill>
+              <a:effectLst/>
+              <a:uFillTx/>
+              <a:latin typeface="Arial"/>
+            </a:endParaRPr>
+          </a:p>
+        </p:txBody>
+      </p:sp>
+      <p:sp>
+        <p:nvSpPr>
+          <p:cNvPr id="5" name="PlaceHolder 2"/>
+          <p:cNvSpPr>
+            <a:spLocks noGrp="1"/>
+          </p:cNvSpPr>
+          <p:nvPr>
+            <p:ph/>
+          </p:nvPr>
+        </p:nvSpPr>
+        <p:spPr>
+          <a:xfrm>
+            <a:off x="609480" y="1604520"/>
+            <a:ext cx="10972440" cy="3977280"/>
+          </a:xfrm>
+          <a:prstGeom prst="rect">
+            <a:avLst/>
+          </a:prstGeom>
+          <a:noFill/>
+          <a:ln w="0">
+            <a:noFill/>
+          </a:ln>
+        </p:spPr>
+        <p:txBody>
+          <a:bodyPr lIns="0" rIns="0" tIns="0" bIns="0" anchor="t">
+            <a:normAutofit/>
+          </a:bodyPr>
+          <a:p>
+            <a:pPr indent="0">
+              <a:spcBef>
+                <a:spcPts val="1417"/>
+              </a:spcBef>
+              <a:buNone/>
+            </a:pPr>
+            <a:endParaRPr lang="en-GB" sz="1800" b="0" u="none" strike="noStrike">
+              <a:solidFill>
+                <a:srgbClr val="000000"/>
+              </a:solidFill>
+              <a:effectLst/>
+              <a:uFillTx/>
+              <a:latin typeface="Arial"/>
+            </a:endParaRPr>
+          </a:p>
+        </p:txBody>
+      </p:sp>
+    </p:spTree>
+  </p:cSld>
+</p:sldLayout>
+</file>
+
+<file path=ppt/slideLayouts/slideLayout2.xml><?xml version="1.0" encoding="utf-8"?>
+<p:sldLayout xmlns:a="http://schemas.openxmlformats.org/drawingml/2006/main" xmlns:p="http://schemas.openxmlformats.org/presentationml/2006/main" xmlns:r="http://schemas.openxmlformats.org/officeDocument/2006/relationships" xmlns:p14="http://schemas.microsoft.com/office/powerpoint/2010/main" xmlns:p15="http://schemas.microsoft.com/office/powerpoint/2012/main" xmlns:mc="http://schemas.openxmlformats.org/markup-compatibility/2006" type="blank" preserve="1">
+  <p:cSld name="Default">
     <p:spTree>
       <p:nvGrpSpPr>
         <p:cNvPr id="1" name=""/>
@@ -48,15 +158,12 @@
       </p:grpSpPr>
     </p:spTree>
   </p:cSld>
-  <p:clrMapOvr>
-    <a:masterClrMapping/>
-  </p:clrMapOvr>
 </p:sldLayout>
 </file>
 
-<file path=ppt/slideMasters/slideMaster1.xml><?xml version="1.0" encoding="utf-8"?>
-<p:sldMaster xmlns:a="http://schemas.openxmlformats.org/drawingml/2006/main" xmlns:r="http://schemas.openxmlformats.org/officeDocument/2006/relationships" xmlns:p="http://schemas.openxmlformats.org/presentationml/2006/main">
-  <p:cSld>
+<file path=ppt/slideLayouts/slideLayout3.xml><?xml version="1.0" encoding="utf-8"?>
+<p:sldLayout xmlns:a="http://schemas.openxmlformats.org/drawingml/2006/main" xmlns:p="http://schemas.openxmlformats.org/presentationml/2006/main" xmlns:r="http://schemas.openxmlformats.org/officeDocument/2006/relationships" xmlns:p14="http://schemas.microsoft.com/office/powerpoint/2010/main" xmlns:p15="http://schemas.microsoft.com/office/powerpoint/2012/main" xmlns:mc="http://schemas.openxmlformats.org/markup-compatibility/2006" type="title" preserve="1">
+  <p:cSld name="Default">
     <p:spTree>
       <p:nvGrpSpPr>
         <p:cNvPr id="1" name=""/>
@@ -71,28 +178,97 @@
           <a:chExt cx="0" cy="0"/>
         </a:xfrm>
       </p:grpSpPr>
+      <p:sp>
+        <p:nvSpPr>
+          <p:cNvPr id="6" name="PlaceHolder 1"/>
+          <p:cNvSpPr>
+            <a:spLocks noGrp="1"/>
+          </p:cNvSpPr>
+          <p:nvPr>
+            <p:ph type="title"/>
+          </p:nvPr>
+        </p:nvSpPr>
+        <p:spPr>
+          <a:xfrm>
+            <a:off x="609480" y="273600"/>
+            <a:ext cx="10972440" cy="1144800"/>
+          </a:xfrm>
+          <a:prstGeom prst="rect">
+            <a:avLst/>
+          </a:prstGeom>
+          <a:noFill/>
+          <a:ln w="0">
+            <a:noFill/>
+          </a:ln>
+        </p:spPr>
+        <p:txBody>
+          <a:bodyPr lIns="0" rIns="0" tIns="0" bIns="0" anchor="ctr">
+            <a:spAutoFit/>
+          </a:bodyPr>
+          <a:p>
+            <a:pPr indent="0" algn="ctr">
+              <a:buNone/>
+            </a:pPr>
+            <a:endParaRPr lang="en-GB" sz="1800" b="0" u="none" strike="noStrike">
+              <a:solidFill>
+                <a:srgbClr val="000000"/>
+              </a:solidFill>
+              <a:effectLst/>
+              <a:uFillTx/>
+              <a:latin typeface="Arial"/>
+            </a:endParaRPr>
+          </a:p>
+        </p:txBody>
+      </p:sp>
+      <p:sp>
+        <p:nvSpPr>
+          <p:cNvPr id="7" name="PlaceHolder 2"/>
+          <p:cNvSpPr>
+            <a:spLocks noGrp="1"/>
+          </p:cNvSpPr>
+          <p:nvPr>
+            <p:ph type="subTitle"/>
+          </p:nvPr>
+        </p:nvSpPr>
+        <p:spPr>
+          <a:xfrm>
+            <a:off x="609480" y="1604520"/>
+            <a:ext cx="10972440" cy="3977280"/>
+          </a:xfrm>
+          <a:prstGeom prst="rect">
+            <a:avLst/>
+          </a:prstGeom>
+          <a:noFill/>
+          <a:ln w="0">
+            <a:noFill/>
+          </a:ln>
+        </p:spPr>
+        <p:txBody>
+          <a:bodyPr lIns="0" rIns="0" tIns="0" bIns="0" anchor="ctr">
+            <a:spAutoFit/>
+          </a:bodyPr>
+          <a:p>
+            <a:pPr indent="0" algn="ctr">
+              <a:buNone/>
+            </a:pPr>
+            <a:endParaRPr lang="en-GB" sz="3200" b="0" u="none" strike="noStrike">
+              <a:solidFill>
+                <a:srgbClr val="000000"/>
+              </a:solidFill>
+              <a:effectLst/>
+              <a:uFillTx/>
+              <a:latin typeface="Arial"/>
+            </a:endParaRPr>
+          </a:p>
+        </p:txBody>
+      </p:sp>
     </p:spTree>
   </p:cSld>
-  <p:clrMap bg1="lt1" tx1="dk1" bg2="lt2" tx2="dk2" accent1="accent1" accent2="accent2" accent3="accent3" accent4="accent4" accent5="accent5" accent6="accent6" hlink="hlink" folHlink="folHlink"/>
-  <p:sldLayoutIdLst>
-    <p:sldLayoutId id="1" r:id="rId1"/>
-  </p:sldLayoutIdLst>
-  <p:txStyles>
-    <p:titleStyle>
-      <a:lstStyle/>
-    </p:titleStyle>
-    <p:bodyStyle>
-      <a:lstStyle/>
-    </p:bodyStyle>
-    <p:otherStyle>
-      <a:lstStyle/>
-    </p:otherStyle>
-  </p:txStyles>
-</p:sldMaster>
+</p:sldLayout>
 </file>
 
-<file path=ppt/slides/slide1.xml><?xml version="1.0" encoding="utf-8"?>
-<p:sld xmlns:a="http://schemas.openxmlformats.org/drawingml/2006/main" xmlns:r="http://schemas.openxmlformats.org/officeDocument/2006/relationships" xmlns:p="http://schemas.openxmlformats.org/presentationml/2006/main">
+<file path=ppt/slideMasters/slideMaster1.xml><?xml version="1.0" encoding="utf-8"?>
+<p:sldMaster xmlns:a="http://schemas.openxmlformats.org/drawingml/2006/main" xmlns:p="http://schemas.openxmlformats.org/presentationml/2006/main" xmlns:r="http://schemas.openxmlformats.org/officeDocument/2006/relationships" xmlns:p14="http://schemas.microsoft.com/office/powerpoint/2010/main" xmlns:p15="http://schemas.microsoft.com/office/powerpoint/2012/main" xmlns:mc="http://schemas.openxmlformats.org/markup-compatibility/2006">
   <p:cSld>
     <p:spTree>
       <p:nvGrpSpPr>
@@ -110,79 +286,323 @@
       </p:grpSpPr>
       <p:sp>
         <p:nvSpPr>
-          <p:cNvPr id="2" name="Title"/>
-          <p:cNvSpPr/>
-          <p:nvPr/>
+          <p:cNvPr id="2" name="PlaceHolder 1"/>
+          <p:cNvSpPr>
+            <a:spLocks noGrp="1"/>
+          </p:cNvSpPr>
+          <p:nvPr>
+            <p:ph type="title"/>
+          </p:nvPr>
         </p:nvSpPr>
         <p:spPr>
           <a:xfrm>
-            <a:off x="457200" y="228600"/>
-            <a:ext cx="11176000" cy="685800"/>
+            <a:off x="609480" y="273600"/>
+            <a:ext cx="10972440" cy="1144800"/>
           </a:xfrm>
           <a:prstGeom prst="rect">
             <a:avLst/>
           </a:prstGeom>
+          <a:noFill/>
+          <a:ln w="0">
+            <a:noFill/>
+          </a:ln>
         </p:spPr>
         <p:txBody>
-          <a:bodyPr/>
-          <a:lstStyle/>
-          <a:p>
-            <a:r>
-              <a:t>RTC Chat Project</a:t>
-            </a:r>
+          <a:bodyPr lIns="0" rIns="0" tIns="0" bIns="0" anchor="ctr">
+            <a:noAutofit/>
+          </a:bodyPr>
+          <a:p>
+            <a:pPr indent="0" algn="ctr">
+              <a:buNone/>
+            </a:pPr>
+            <a:r>
+              <a:rPr lang="en-GB" sz="1800" b="0" u="none" strike="noStrike">
+                <a:solidFill>
+                  <a:srgbClr val="000000"/>
+                </a:solidFill>
+                <a:effectLst/>
+                <a:uFillTx/>
+                <a:latin typeface="Arial"/>
+              </a:rPr>
+              <a:t>Click to edit the title text format</a:t>
+            </a:r>
+            <a:endParaRPr lang="en-GB" sz="1800" b="0" u="none" strike="noStrike">
+              <a:solidFill>
+                <a:srgbClr val="000000"/>
+              </a:solidFill>
+              <a:effectLst/>
+              <a:uFillTx/>
+              <a:latin typeface="Arial"/>
+            </a:endParaRPr>
           </a:p>
         </p:txBody>
       </p:sp>
       <p:sp>
         <p:nvSpPr>
-          <p:cNvPr id="3" name="Body"/>
-          <p:cNvSpPr/>
-          <p:nvPr/>
+          <p:cNvPr id="3" name="PlaceHolder 2"/>
+          <p:cNvSpPr>
+            <a:spLocks noGrp="1"/>
+          </p:cNvSpPr>
+          <p:nvPr>
+            <p:ph type="body"/>
+          </p:nvPr>
         </p:nvSpPr>
         <p:spPr>
           <a:xfrm>
-            <a:off x="685800" y="1371600"/>
-            <a:ext cx="10800000" cy="4572000"/>
+            <a:off x="609480" y="1604520"/>
+            <a:ext cx="10972440" cy="3977280"/>
           </a:xfrm>
           <a:prstGeom prst="rect">
             <a:avLst/>
           </a:prstGeom>
+          <a:noFill/>
+          <a:ln w="0">
+            <a:noFill/>
+          </a:ln>
         </p:spPr>
         <p:txBody>
-          <a:bodyPr wrap="square"/>
-          <a:lstStyle/>
-          <a:p>
-            <a:r>
-              <a:t>- Discord-like real time chat app</a:t>
-            </a:r>
-          </a:p>
-          <a:p>
-            <a:r>
-              <a:t>- Frontend: Next.js (React)</a:t>
-            </a:r>
-          </a:p>
-          <a:p>
-            <a:r>
-              <a:t>- Backend: Rust + Axum</a:t>
-            </a:r>
-          </a:p>
-          <a:p>
-            <a:r>
-              <a:t>- Database: PostgreSQL (Railway)</a:t>
-            </a:r>
+          <a:bodyPr lIns="0" rIns="0" tIns="0" bIns="0" anchor="t">
+            <a:normAutofit/>
+          </a:bodyPr>
+          <a:p>
+            <a:pPr marL="432000" indent="-324000">
+              <a:spcBef>
+                <a:spcPts val="1417"/>
+              </a:spcBef>
+              <a:buClr>
+                <a:srgbClr val="000000"/>
+              </a:buClr>
+              <a:buSzPct val="45000"/>
+              <a:buFont typeface="Wingdings" charset="2"/>
+              <a:buChar char=""/>
+            </a:pPr>
+            <a:r>
+              <a:rPr lang="en-GB" sz="1800" b="0" u="none" strike="noStrike">
+                <a:solidFill>
+                  <a:srgbClr val="000000"/>
+                </a:solidFill>
+                <a:effectLst/>
+                <a:uFillTx/>
+                <a:latin typeface="Arial"/>
+              </a:rPr>
+              <a:t>Click to edit the outline text format</a:t>
+            </a:r>
+            <a:endParaRPr lang="en-GB" sz="1800" b="0" u="none" strike="noStrike">
+              <a:solidFill>
+                <a:srgbClr val="000000"/>
+              </a:solidFill>
+              <a:effectLst/>
+              <a:uFillTx/>
+              <a:latin typeface="Arial"/>
+            </a:endParaRPr>
+          </a:p>
+          <a:p>
+            <a:pPr marL="864000" lvl="1" indent="-324000">
+              <a:spcBef>
+                <a:spcPts val="1134"/>
+              </a:spcBef>
+              <a:buClr>
+                <a:srgbClr val="000000"/>
+              </a:buClr>
+              <a:buSzPct val="75000"/>
+              <a:buFont typeface="Symbol" charset="2"/>
+              <a:buChar char=""/>
+            </a:pPr>
+            <a:r>
+              <a:rPr lang="en-GB" sz="1800" b="0" u="none" strike="noStrike">
+                <a:solidFill>
+                  <a:srgbClr val="000000"/>
+                </a:solidFill>
+                <a:effectLst/>
+                <a:uFillTx/>
+                <a:latin typeface="Arial"/>
+              </a:rPr>
+              <a:t>Second Outline Level</a:t>
+            </a:r>
+            <a:endParaRPr lang="en-GB" sz="1800" b="0" u="none" strike="noStrike">
+              <a:solidFill>
+                <a:srgbClr val="000000"/>
+              </a:solidFill>
+              <a:effectLst/>
+              <a:uFillTx/>
+              <a:latin typeface="Arial"/>
+            </a:endParaRPr>
+          </a:p>
+          <a:p>
+            <a:pPr marL="1296000" lvl="2" indent="-288000">
+              <a:spcBef>
+                <a:spcPts val="850"/>
+              </a:spcBef>
+              <a:buClr>
+                <a:srgbClr val="000000"/>
+              </a:buClr>
+              <a:buSzPct val="45000"/>
+              <a:buFont typeface="Wingdings" charset="2"/>
+              <a:buChar char=""/>
+            </a:pPr>
+            <a:r>
+              <a:rPr lang="en-GB" sz="1800" b="0" u="none" strike="noStrike">
+                <a:solidFill>
+                  <a:srgbClr val="000000"/>
+                </a:solidFill>
+                <a:effectLst/>
+                <a:uFillTx/>
+                <a:latin typeface="Arial"/>
+              </a:rPr>
+              <a:t>Third Outline Level</a:t>
+            </a:r>
+            <a:endParaRPr lang="en-GB" sz="1800" b="0" u="none" strike="noStrike">
+              <a:solidFill>
+                <a:srgbClr val="000000"/>
+              </a:solidFill>
+              <a:effectLst/>
+              <a:uFillTx/>
+              <a:latin typeface="Arial"/>
+            </a:endParaRPr>
+          </a:p>
+          <a:p>
+            <a:pPr marL="1728000" lvl="3" indent="-216000">
+              <a:spcBef>
+                <a:spcPts val="567"/>
+              </a:spcBef>
+              <a:buClr>
+                <a:srgbClr val="000000"/>
+              </a:buClr>
+              <a:buSzPct val="75000"/>
+              <a:buFont typeface="Symbol" charset="2"/>
+              <a:buChar char=""/>
+            </a:pPr>
+            <a:r>
+              <a:rPr lang="en-GB" sz="1800" b="0" u="none" strike="noStrike">
+                <a:solidFill>
+                  <a:srgbClr val="000000"/>
+                </a:solidFill>
+                <a:effectLst/>
+                <a:uFillTx/>
+                <a:latin typeface="Arial"/>
+              </a:rPr>
+              <a:t>Fourth Outline Level</a:t>
+            </a:r>
+            <a:endParaRPr lang="en-GB" sz="1800" b="0" u="none" strike="noStrike">
+              <a:solidFill>
+                <a:srgbClr val="000000"/>
+              </a:solidFill>
+              <a:effectLst/>
+              <a:uFillTx/>
+              <a:latin typeface="Arial"/>
+            </a:endParaRPr>
+          </a:p>
+          <a:p>
+            <a:pPr marL="2160000" lvl="4" indent="-216000">
+              <a:spcBef>
+                <a:spcPts val="283"/>
+              </a:spcBef>
+              <a:buClr>
+                <a:srgbClr val="000000"/>
+              </a:buClr>
+              <a:buSzPct val="45000"/>
+              <a:buFont typeface="Wingdings" charset="2"/>
+              <a:buChar char=""/>
+            </a:pPr>
+            <a:r>
+              <a:rPr lang="en-GB" sz="2000" b="0" u="none" strike="noStrike">
+                <a:solidFill>
+                  <a:srgbClr val="000000"/>
+                </a:solidFill>
+                <a:effectLst/>
+                <a:uFillTx/>
+                <a:latin typeface="Arial"/>
+              </a:rPr>
+              <a:t>Fifth Outline Level</a:t>
+            </a:r>
+            <a:endParaRPr lang="en-GB" sz="2000" b="0" u="none" strike="noStrike">
+              <a:solidFill>
+                <a:srgbClr val="000000"/>
+              </a:solidFill>
+              <a:effectLst/>
+              <a:uFillTx/>
+              <a:latin typeface="Arial"/>
+            </a:endParaRPr>
+          </a:p>
+          <a:p>
+            <a:pPr marL="2592000" lvl="5" indent="-216000">
+              <a:spcBef>
+                <a:spcPts val="283"/>
+              </a:spcBef>
+              <a:buClr>
+                <a:srgbClr val="000000"/>
+              </a:buClr>
+              <a:buSzPct val="45000"/>
+              <a:buFont typeface="Wingdings" charset="2"/>
+              <a:buChar char=""/>
+            </a:pPr>
+            <a:r>
+              <a:rPr lang="en-GB" sz="2000" b="0" u="none" strike="noStrike">
+                <a:solidFill>
+                  <a:srgbClr val="000000"/>
+                </a:solidFill>
+                <a:effectLst/>
+                <a:uFillTx/>
+                <a:latin typeface="Arial"/>
+              </a:rPr>
+              <a:t>Sixth Outline Level</a:t>
+            </a:r>
+            <a:endParaRPr lang="en-GB" sz="2000" b="0" u="none" strike="noStrike">
+              <a:solidFill>
+                <a:srgbClr val="000000"/>
+              </a:solidFill>
+              <a:effectLst/>
+              <a:uFillTx/>
+              <a:latin typeface="Arial"/>
+            </a:endParaRPr>
+          </a:p>
+          <a:p>
+            <a:pPr marL="3024000" lvl="6" indent="-216000">
+              <a:spcBef>
+                <a:spcPts val="283"/>
+              </a:spcBef>
+              <a:buClr>
+                <a:srgbClr val="000000"/>
+              </a:buClr>
+              <a:buSzPct val="45000"/>
+              <a:buFont typeface="Wingdings" charset="2"/>
+              <a:buChar char=""/>
+            </a:pPr>
+            <a:r>
+              <a:rPr lang="en-GB" sz="2000" b="0" u="none" strike="noStrike">
+                <a:solidFill>
+                  <a:srgbClr val="000000"/>
+                </a:solidFill>
+                <a:effectLst/>
+                <a:uFillTx/>
+                <a:latin typeface="Arial"/>
+              </a:rPr>
+              <a:t>Seventh Outline Level</a:t>
+            </a:r>
+            <a:endParaRPr lang="en-GB" sz="2000" b="0" u="none" strike="noStrike">
+              <a:solidFill>
+                <a:srgbClr val="000000"/>
+              </a:solidFill>
+              <a:effectLst/>
+              <a:uFillTx/>
+              <a:latin typeface="Arial"/>
+            </a:endParaRPr>
           </a:p>
         </p:txBody>
       </p:sp>
     </p:spTree>
   </p:cSld>
-  <p:clrMapOvr>
-    <a:masterClrMapping/>
-  </p:clrMapOvr>
-</p:sld>
+  <p:clrMap bg1="lt1" tx1="dk1" bg2="lt2" tx2="dk2" accent1="accent1" accent2="accent2" accent3="accent3" accent4="accent4" accent5="accent5" accent6="accent6" hlink="hlink" folHlink="folHlink"/>
+  <p:sldLayoutIdLst>
+    <p:sldLayoutId id="2147483649" r:id="rId2"/>
+    <p:sldLayoutId id="2147483650" r:id="rId3"/>
+    <p:sldLayoutId id="2147483651" r:id="rId4"/>
+  </p:sldLayoutIdLst>
+</p:sldMaster>
 </file>
 
-<file path=ppt/slides/slide10.xml><?xml version="1.0" encoding="utf-8"?>
-<p:sld xmlns:a="http://schemas.openxmlformats.org/drawingml/2006/main" xmlns:r="http://schemas.openxmlformats.org/officeDocument/2006/relationships" xmlns:p="http://schemas.openxmlformats.org/presentationml/2006/main">
+<file path=ppt/slides/slide1.xml><?xml version="1.0" encoding="utf-8"?>
+<p:sld xmlns:a="http://schemas.openxmlformats.org/drawingml/2006/main" xmlns:p="http://schemas.openxmlformats.org/presentationml/2006/main" xmlns:r="http://schemas.openxmlformats.org/officeDocument/2006/relationships" xmlns:p14="http://schemas.microsoft.com/office/powerpoint/2010/main" xmlns:p15="http://schemas.microsoft.com/office/powerpoint/2012/main" xmlns:mc="http://schemas.openxmlformats.org/markup-compatibility/2006">
   <p:cSld>
     <p:spTree>
       <p:nvGrpSpPr>
@@ -200,74 +620,136 @@
       </p:grpSpPr>
       <p:sp>
         <p:nvSpPr>
-          <p:cNvPr id="2" name="Title"/>
-          <p:cNvSpPr/>
-          <p:nvPr/>
+          <p:cNvPr id="8" name="PlaceHolder 1"/>
+          <p:cNvSpPr>
+            <a:spLocks noGrp="1"/>
+          </p:cNvSpPr>
+          <p:nvPr>
+            <p:ph type="title"/>
+          </p:nvPr>
         </p:nvSpPr>
         <p:spPr>
           <a:xfrm>
-            <a:off x="457200" y="228600"/>
-            <a:ext cx="11176000" cy="685800"/>
+            <a:off x="609480" y="273600"/>
+            <a:ext cx="10972440" cy="1144800"/>
           </a:xfrm>
           <a:prstGeom prst="rect">
             <a:avLst/>
           </a:prstGeom>
+          <a:noFill/>
+          <a:ln w="0">
+            <a:noFill/>
+          </a:ln>
         </p:spPr>
         <p:txBody>
-          <a:bodyPr/>
-          <a:lstStyle/>
-          <a:p>
-            <a:r>
-              <a:t>Presence and Typing</a:t>
-            </a:r>
+          <a:bodyPr lIns="0" rIns="0" tIns="0" bIns="0" anchor="ctr">
+            <a:spAutoFit/>
+          </a:bodyPr>
+          <a:p>
+            <a:pPr indent="0">
+              <a:lnSpc>
+                <a:spcPct val="100000"/>
+              </a:lnSpc>
+              <a:buNone/>
+            </a:pPr>
+            <a:r>
+              <a:rPr lang="en-GB" sz="1800" b="0" u="none" strike="noStrike">
+                <a:solidFill>
+                  <a:srgbClr val="000000"/>
+                </a:solidFill>
+                <a:effectLst/>
+                <a:uFillTx/>
+                <a:latin typeface="Arial"/>
+              </a:rPr>
+              <a:t>RTC Chat Project</a:t>
+            </a:r>
+            <a:endParaRPr lang="en-GB" sz="1800" b="0" u="none" strike="noStrike">
+              <a:solidFill>
+                <a:srgbClr val="000000"/>
+              </a:solidFill>
+              <a:effectLst/>
+              <a:uFillTx/>
+              <a:latin typeface="Arial"/>
+            </a:endParaRPr>
           </a:p>
         </p:txBody>
       </p:sp>
       <p:sp>
         <p:nvSpPr>
-          <p:cNvPr id="3" name="Body"/>
-          <p:cNvSpPr/>
-          <p:nvPr/>
+          <p:cNvPr id="9" name="PlaceHolder 2"/>
+          <p:cNvSpPr>
+            <a:spLocks noGrp="1"/>
+          </p:cNvSpPr>
+          <p:nvPr>
+            <p:ph/>
+          </p:nvPr>
         </p:nvSpPr>
         <p:spPr>
           <a:xfrm>
-            <a:off x="685800" y="1371600"/>
-            <a:ext cx="10800000" cy="4572000"/>
+            <a:off x="609480" y="1604520"/>
+            <a:ext cx="10972440" cy="3977280"/>
           </a:xfrm>
           <a:prstGeom prst="rect">
             <a:avLst/>
           </a:prstGeom>
+          <a:noFill/>
+          <a:ln w="0">
+            <a:noFill/>
+          </a:ln>
         </p:spPr>
         <p:txBody>
-          <a:bodyPr wrap="square"/>
-          <a:lstStyle/>
-          <a:p>
-            <a:r>
-              <a:t>- Server presence via WS subscribe</a:t>
-            </a:r>
-          </a:p>
-          <a:p>
-            <a:r>
-              <a:t>- Typing indicators for channels and DMs</a:t>
-            </a:r>
-          </a:p>
-          <a:p>
-            <a:r>
-              <a:t>- Online status updates broadcasted</a:t>
-            </a:r>
+          <a:bodyPr lIns="0" rIns="0" tIns="0" bIns="0" anchor="t">
+            <a:normAutofit/>
+          </a:bodyPr>
+          <a:p>
+            <a:pPr marL="432000" indent="-324000">
+              <a:spcBef>
+                <a:spcPts val="1417"/>
+              </a:spcBef>
+              <a:buClr>
+                <a:srgbClr val="000000"/>
+              </a:buClr>
+              <a:buSzPct val="45000"/>
+              <a:buFont typeface="Wingdings" charset="2"/>
+              <a:buChar char=""/>
+            </a:pPr>
+            <a:r>
+              <a:rPr lang="en-GB" sz="1800" b="0" u="none" strike="noStrike">
+                <a:solidFill>
+                  <a:srgbClr val="000000"/>
+                </a:solidFill>
+                <a:effectLst/>
+                <a:uFillTx/>
+                <a:latin typeface="Arial"/>
+              </a:rPr>
+              <a:t>Presentation of team</a:t>
+            </a:r>
+            <a:endParaRPr lang="en-GB" sz="1800" b="0" u="none" strike="noStrike">
+              <a:solidFill>
+                <a:srgbClr val="000000"/>
+              </a:solidFill>
+              <a:effectLst/>
+              <a:uFillTx/>
+              <a:latin typeface="Arial"/>
+            </a:endParaRPr>
           </a:p>
         </p:txBody>
       </p:sp>
     </p:spTree>
   </p:cSld>
-  <p:clrMapOvr>
-    <a:masterClrMapping/>
-  </p:clrMapOvr>
+  <mc:AlternateContent>
+    <mc:Choice Requires="p14">
+      <p:transition spd="slow" p14:dur="2000"/>
+    </mc:Choice>
+    <mc:Fallback>
+      <p:transition spd="slow"/>
+    </mc:Fallback>
+  </mc:AlternateContent>
 </p:sld>
 </file>
 
-<file path=ppt/slides/slide11.xml><?xml version="1.0" encoding="utf-8"?>
-<p:sld xmlns:a="http://schemas.openxmlformats.org/drawingml/2006/main" xmlns:r="http://schemas.openxmlformats.org/officeDocument/2006/relationships" xmlns:p="http://schemas.openxmlformats.org/presentationml/2006/main">
+<file path=ppt/slides/slide10.xml><?xml version="1.0" encoding="utf-8"?>
+<p:sld xmlns:a="http://schemas.openxmlformats.org/drawingml/2006/main" xmlns:p="http://schemas.openxmlformats.org/presentationml/2006/main" xmlns:r="http://schemas.openxmlformats.org/officeDocument/2006/relationships" xmlns:p14="http://schemas.microsoft.com/office/powerpoint/2010/main" xmlns:p15="http://schemas.microsoft.com/office/powerpoint/2012/main" xmlns:mc="http://schemas.openxmlformats.org/markup-compatibility/2006">
   <p:cSld>
     <p:spTree>
       <p:nvGrpSpPr>
@@ -285,84 +767,211 @@
       </p:grpSpPr>
       <p:sp>
         <p:nvSpPr>
-          <p:cNvPr id="2" name="Title"/>
+          <p:cNvPr id="26" name="Title"/>
           <p:cNvSpPr/>
           <p:nvPr/>
         </p:nvSpPr>
         <p:spPr>
           <a:xfrm>
             <a:off x="457200" y="228600"/>
-            <a:ext cx="11176000" cy="685800"/>
+            <a:ext cx="11175480" cy="685440"/>
           </a:xfrm>
           <a:prstGeom prst="rect">
             <a:avLst/>
           </a:prstGeom>
+          <a:noFill/>
+          <a:ln w="0">
+            <a:noFill/>
+          </a:ln>
         </p:spPr>
+        <p:style>
+          <a:lnRef idx="0"/>
+          <a:fillRef idx="0"/>
+          <a:effectRef idx="0"/>
+          <a:fontRef idx="minor"/>
+        </p:style>
         <p:txBody>
-          <a:bodyPr/>
-          <a:lstStyle/>
-          <a:p>
-            <a:r>
-              <a:t>API Surface</a:t>
-            </a:r>
+          <a:bodyPr lIns="90000" rIns="90000" tIns="45000" bIns="45000" anchor="t">
+            <a:noAutofit/>
+          </a:bodyPr>
+          <a:p>
+            <a:pPr>
+              <a:lnSpc>
+                <a:spcPct val="100000"/>
+              </a:lnSpc>
+            </a:pPr>
+            <a:r>
+              <a:rPr lang="en-GB" sz="1800" b="0" u="none" strike="noStrike">
+                <a:solidFill>
+                  <a:srgbClr val="000000"/>
+                </a:solidFill>
+                <a:effectLst/>
+                <a:uFillTx/>
+                <a:latin typeface="Arial"/>
+              </a:rPr>
+              <a:t>Direct Messages + Friends</a:t>
+            </a:r>
+            <a:endParaRPr lang="en-GB" sz="1800" b="0" u="none" strike="noStrike">
+              <a:solidFill>
+                <a:srgbClr val="000000"/>
+              </a:solidFill>
+              <a:effectLst/>
+              <a:uFillTx/>
+              <a:latin typeface="Arial"/>
+            </a:endParaRPr>
           </a:p>
         </p:txBody>
       </p:sp>
       <p:sp>
         <p:nvSpPr>
-          <p:cNvPr id="3" name="Body"/>
+          <p:cNvPr id="27" name="Body"/>
           <p:cNvSpPr/>
           <p:nvPr/>
         </p:nvSpPr>
         <p:spPr>
           <a:xfrm>
             <a:off x="685800" y="1371600"/>
-            <a:ext cx="10800000" cy="4572000"/>
+            <a:ext cx="10799640" cy="4571640"/>
           </a:xfrm>
           <a:prstGeom prst="rect">
             <a:avLst/>
           </a:prstGeom>
+          <a:noFill/>
+          <a:ln w="0">
+            <a:noFill/>
+          </a:ln>
         </p:spPr>
+        <p:style>
+          <a:lnRef idx="0"/>
+          <a:fillRef idx="0"/>
+          <a:effectRef idx="0"/>
+          <a:fontRef idx="minor"/>
+        </p:style>
         <p:txBody>
-          <a:bodyPr wrap="square"/>
-          <a:lstStyle/>
-          <a:p>
-            <a:r>
-              <a:t>- Auth: /auth/signup, /auth/login, /auth/logout</a:t>
-            </a:r>
-          </a:p>
-          <a:p>
-            <a:r>
-              <a:t>- Servers: /servers, /servers/{id}</a:t>
-            </a:r>
-          </a:p>
-          <a:p>
-            <a:r>
-              <a:t>- Channels: /servers/{id}/channels</a:t>
-            </a:r>
-          </a:p>
-          <a:p>
-            <a:r>
-              <a:t>- Messages: /channels/{id}/messages</a:t>
-            </a:r>
-          </a:p>
-          <a:p>
-            <a:r>
-              <a:t>- WS: /ws?token=JWT</a:t>
-            </a:r>
+          <a:bodyPr lIns="90000" rIns="90000" tIns="45000" bIns="45000" anchor="t">
+            <a:noAutofit/>
+          </a:bodyPr>
+          <a:p>
+            <a:pPr>
+              <a:lnSpc>
+                <a:spcPct val="100000"/>
+              </a:lnSpc>
+            </a:pPr>
+            <a:r>
+              <a:rPr lang="en-GB" sz="1800" b="0" u="none" strike="noStrike">
+                <a:solidFill>
+                  <a:srgbClr val="000000"/>
+                </a:solidFill>
+                <a:effectLst/>
+                <a:uFillTx/>
+                <a:latin typeface="Arial"/>
+              </a:rPr>
+              <a:t>- Friend requests via friend code</a:t>
+            </a:r>
+            <a:endParaRPr lang="en-GB" sz="1800" b="0" u="none" strike="noStrike">
+              <a:solidFill>
+                <a:srgbClr val="000000"/>
+              </a:solidFill>
+              <a:effectLst/>
+              <a:uFillTx/>
+              <a:latin typeface="Arial"/>
+            </a:endParaRPr>
+          </a:p>
+          <a:p>
+            <a:pPr>
+              <a:lnSpc>
+                <a:spcPct val="100000"/>
+              </a:lnSpc>
+            </a:pPr>
+            <a:r>
+              <a:rPr lang="en-GB" sz="1800" b="0" u="none" strike="noStrike">
+                <a:solidFill>
+                  <a:srgbClr val="000000"/>
+                </a:solidFill>
+                <a:effectLst/>
+                <a:uFillTx/>
+                <a:latin typeface="Arial"/>
+              </a:rPr>
+              <a:t>- Accept/decline requests</a:t>
+            </a:r>
+            <a:endParaRPr lang="en-GB" sz="1800" b="0" u="none" strike="noStrike">
+              <a:solidFill>
+                <a:srgbClr val="000000"/>
+              </a:solidFill>
+              <a:effectLst/>
+              <a:uFillTx/>
+              <a:latin typeface="Arial"/>
+            </a:endParaRPr>
+          </a:p>
+          <a:p>
+            <a:pPr>
+              <a:lnSpc>
+                <a:spcPct val="100000"/>
+              </a:lnSpc>
+            </a:pPr>
+            <a:r>
+              <a:rPr lang="en-GB" sz="1800" b="0" u="none" strike="noStrike">
+                <a:solidFill>
+                  <a:srgbClr val="000000"/>
+                </a:solidFill>
+                <a:effectLst/>
+                <a:uFillTx/>
+                <a:latin typeface="Arial"/>
+              </a:rPr>
+              <a:t>- Direct message threads</a:t>
+            </a:r>
+            <a:endParaRPr lang="en-GB" sz="1800" b="0" u="none" strike="noStrike">
+              <a:solidFill>
+                <a:srgbClr val="000000"/>
+              </a:solidFill>
+              <a:effectLst/>
+              <a:uFillTx/>
+              <a:latin typeface="Arial"/>
+            </a:endParaRPr>
+          </a:p>
+          <a:p>
+            <a:pPr>
+              <a:lnSpc>
+                <a:spcPct val="100000"/>
+              </a:lnSpc>
+            </a:pPr>
+            <a:r>
+              <a:rPr lang="en-GB" sz="1800" b="0" u="none" strike="noStrike">
+                <a:solidFill>
+                  <a:srgbClr val="000000"/>
+                </a:solidFill>
+                <a:effectLst/>
+                <a:uFillTx/>
+                <a:latin typeface="Arial"/>
+              </a:rPr>
+              <a:t>- Typing and status updates over WS</a:t>
+            </a:r>
+            <a:endParaRPr lang="en-GB" sz="1800" b="0" u="none" strike="noStrike">
+              <a:solidFill>
+                <a:srgbClr val="000000"/>
+              </a:solidFill>
+              <a:effectLst/>
+              <a:uFillTx/>
+              <a:latin typeface="Arial"/>
+            </a:endParaRPr>
           </a:p>
         </p:txBody>
       </p:sp>
     </p:spTree>
   </p:cSld>
-  <p:clrMapOvr>
-    <a:masterClrMapping/>
-  </p:clrMapOvr>
+  <mc:AlternateContent>
+    <mc:Choice Requires="p14">
+      <p:transition spd="slow" p14:dur="2000"/>
+    </mc:Choice>
+    <mc:Fallback>
+      <p:transition spd="slow"/>
+    </mc:Fallback>
+  </mc:AlternateContent>
 </p:sld>
 </file>
 
-<file path=ppt/slides/slide12.xml><?xml version="1.0" encoding="utf-8"?>
-<p:sld xmlns:a="http://schemas.openxmlformats.org/drawingml/2006/main" xmlns:r="http://schemas.openxmlformats.org/officeDocument/2006/relationships" xmlns:p="http://schemas.openxmlformats.org/presentationml/2006/main">
+<file path=ppt/slides/slide11.xml><?xml version="1.0" encoding="utf-8"?>
+<p:sld xmlns:a="http://schemas.openxmlformats.org/drawingml/2006/main" xmlns:p="http://schemas.openxmlformats.org/presentationml/2006/main" xmlns:r="http://schemas.openxmlformats.org/officeDocument/2006/relationships" xmlns:p14="http://schemas.microsoft.com/office/powerpoint/2010/main" xmlns:p15="http://schemas.microsoft.com/office/powerpoint/2012/main" xmlns:mc="http://schemas.openxmlformats.org/markup-compatibility/2006">
   <p:cSld>
     <p:spTree>
       <p:nvGrpSpPr>
@@ -380,79 +989,185 @@
       </p:grpSpPr>
       <p:sp>
         <p:nvSpPr>
-          <p:cNvPr id="2" name="Title"/>
+          <p:cNvPr id="28" name="Title"/>
           <p:cNvSpPr/>
           <p:nvPr/>
         </p:nvSpPr>
         <p:spPr>
           <a:xfrm>
             <a:off x="457200" y="228600"/>
-            <a:ext cx="11176000" cy="685800"/>
+            <a:ext cx="11175480" cy="685440"/>
           </a:xfrm>
           <a:prstGeom prst="rect">
             <a:avLst/>
           </a:prstGeom>
+          <a:noFill/>
+          <a:ln w="0">
+            <a:noFill/>
+          </a:ln>
         </p:spPr>
+        <p:style>
+          <a:lnRef idx="0"/>
+          <a:fillRef idx="0"/>
+          <a:effectRef idx="0"/>
+          <a:fontRef idx="minor"/>
+        </p:style>
         <p:txBody>
-          <a:bodyPr/>
-          <a:lstStyle/>
-          <a:p>
-            <a:r>
-              <a:t>Data Model</a:t>
-            </a:r>
+          <a:bodyPr lIns="90000" rIns="90000" tIns="45000" bIns="45000" anchor="t">
+            <a:noAutofit/>
+          </a:bodyPr>
+          <a:p>
+            <a:pPr>
+              <a:lnSpc>
+                <a:spcPct val="100000"/>
+              </a:lnSpc>
+            </a:pPr>
+            <a:r>
+              <a:rPr lang="en-GB" sz="1800" b="0" u="none" strike="noStrike">
+                <a:solidFill>
+                  <a:srgbClr val="000000"/>
+                </a:solidFill>
+                <a:effectLst/>
+                <a:uFillTx/>
+                <a:latin typeface="Arial"/>
+              </a:rPr>
+              <a:t>Presence and Typing</a:t>
+            </a:r>
+            <a:endParaRPr lang="en-GB" sz="1800" b="0" u="none" strike="noStrike">
+              <a:solidFill>
+                <a:srgbClr val="000000"/>
+              </a:solidFill>
+              <a:effectLst/>
+              <a:uFillTx/>
+              <a:latin typeface="Arial"/>
+            </a:endParaRPr>
           </a:p>
         </p:txBody>
       </p:sp>
       <p:sp>
         <p:nvSpPr>
-          <p:cNvPr id="3" name="Body"/>
+          <p:cNvPr id="29" name="Body"/>
           <p:cNvSpPr/>
           <p:nvPr/>
         </p:nvSpPr>
         <p:spPr>
           <a:xfrm>
             <a:off x="685800" y="1371600"/>
-            <a:ext cx="10800000" cy="4572000"/>
+            <a:ext cx="10799640" cy="4571640"/>
           </a:xfrm>
           <a:prstGeom prst="rect">
             <a:avLst/>
           </a:prstGeom>
+          <a:noFill/>
+          <a:ln w="0">
+            <a:noFill/>
+          </a:ln>
         </p:spPr>
+        <p:style>
+          <a:lnRef idx="0"/>
+          <a:fillRef idx="0"/>
+          <a:effectRef idx="0"/>
+          <a:fontRef idx="minor"/>
+        </p:style>
         <p:txBody>
-          <a:bodyPr wrap="square"/>
-          <a:lstStyle/>
-          <a:p>
-            <a:r>
-              <a:t>- users, servers, channels, messages</a:t>
-            </a:r>
-          </a:p>
-          <a:p>
-            <a:r>
-              <a:t>- server_members, invites, reactions</a:t>
-            </a:r>
-          </a:p>
-          <a:p>
-            <a:r>
-              <a:t>- direct_conversations, direct_messages</a:t>
-            </a:r>
-          </a:p>
-          <a:p>
-            <a:r>
-              <a:t>- friend_requests</a:t>
-            </a:r>
+          <a:bodyPr lIns="90000" rIns="90000" tIns="45000" bIns="45000" anchor="t">
+            <a:noAutofit/>
+          </a:bodyPr>
+          <a:p>
+            <a:pPr>
+              <a:lnSpc>
+                <a:spcPct val="100000"/>
+              </a:lnSpc>
+            </a:pPr>
+            <a:r>
+              <a:rPr lang="en-GB" sz="1800" b="0" u="none" strike="noStrike">
+                <a:solidFill>
+                  <a:srgbClr val="000000"/>
+                </a:solidFill>
+                <a:effectLst/>
+                <a:uFillTx/>
+                <a:latin typeface="Arial"/>
+              </a:rPr>
+              <a:t>- Server presence via WS subscribe</a:t>
+            </a:r>
+            <a:endParaRPr lang="en-GB" sz="1800" b="0" u="none" strike="noStrike">
+              <a:solidFill>
+                <a:srgbClr val="000000"/>
+              </a:solidFill>
+              <a:effectLst/>
+              <a:uFillTx/>
+              <a:latin typeface="Arial"/>
+            </a:endParaRPr>
+          </a:p>
+          <a:p>
+            <a:pPr>
+              <a:lnSpc>
+                <a:spcPct val="100000"/>
+              </a:lnSpc>
+            </a:pPr>
+            <a:r>
+              <a:rPr lang="en-GB" sz="1800" b="0" u="none" strike="noStrike">
+                <a:solidFill>
+                  <a:srgbClr val="000000"/>
+                </a:solidFill>
+                <a:effectLst/>
+                <a:uFillTx/>
+                <a:latin typeface="Arial"/>
+              </a:rPr>
+              <a:t>- Typing indicators for channels and DMs</a:t>
+            </a:r>
+            <a:endParaRPr lang="en-GB" sz="1800" b="0" u="none" strike="noStrike">
+              <a:solidFill>
+                <a:srgbClr val="000000"/>
+              </a:solidFill>
+              <a:effectLst/>
+              <a:uFillTx/>
+              <a:latin typeface="Arial"/>
+            </a:endParaRPr>
+          </a:p>
+          <a:p>
+            <a:pPr>
+              <a:lnSpc>
+                <a:spcPct val="100000"/>
+              </a:lnSpc>
+            </a:pPr>
+            <a:r>
+              <a:rPr lang="en-GB" sz="1800" b="0" u="none" strike="noStrike">
+                <a:solidFill>
+                  <a:srgbClr val="000000"/>
+                </a:solidFill>
+                <a:effectLst/>
+                <a:uFillTx/>
+                <a:latin typeface="Arial"/>
+              </a:rPr>
+              <a:t>- Online status updates broadcasted</a:t>
+            </a:r>
+            <a:endParaRPr lang="en-GB" sz="1800" b="0" u="none" strike="noStrike">
+              <a:solidFill>
+                <a:srgbClr val="000000"/>
+              </a:solidFill>
+              <a:effectLst/>
+              <a:uFillTx/>
+              <a:latin typeface="Arial"/>
+            </a:endParaRPr>
           </a:p>
         </p:txBody>
       </p:sp>
     </p:spTree>
   </p:cSld>
-  <p:clrMapOvr>
-    <a:masterClrMapping/>
-  </p:clrMapOvr>
+  <mc:AlternateContent>
+    <mc:Choice Requires="p14">
+      <p:transition spd="slow" p14:dur="2000"/>
+    </mc:Choice>
+    <mc:Fallback>
+      <p:transition spd="slow"/>
+    </mc:Fallback>
+  </mc:AlternateContent>
 </p:sld>
 </file>
 
-<file path=ppt/slides/slide13.xml><?xml version="1.0" encoding="utf-8"?>
-<p:sld xmlns:a="http://schemas.openxmlformats.org/drawingml/2006/main" xmlns:r="http://schemas.openxmlformats.org/officeDocument/2006/relationships" xmlns:p="http://schemas.openxmlformats.org/presentationml/2006/main">
+<file path=ppt/slides/slide12.xml><?xml version="1.0" encoding="utf-8"?>
+<p:sld xmlns:a="http://schemas.openxmlformats.org/drawingml/2006/main" xmlns:p="http://schemas.openxmlformats.org/presentationml/2006/main" xmlns:r="http://schemas.openxmlformats.org/officeDocument/2006/relationships" xmlns:p14="http://schemas.microsoft.com/office/powerpoint/2010/main" xmlns:p15="http://schemas.microsoft.com/office/powerpoint/2012/main" xmlns:mc="http://schemas.openxmlformats.org/markup-compatibility/2006">
   <p:cSld>
     <p:spTree>
       <p:nvGrpSpPr>
@@ -470,79 +1185,237 @@
       </p:grpSpPr>
       <p:sp>
         <p:nvSpPr>
-          <p:cNvPr id="2" name="Title"/>
+          <p:cNvPr id="30" name="Title"/>
           <p:cNvSpPr/>
           <p:nvPr/>
         </p:nvSpPr>
         <p:spPr>
           <a:xfrm>
             <a:off x="457200" y="228600"/>
-            <a:ext cx="11176000" cy="685800"/>
+            <a:ext cx="11175480" cy="685440"/>
           </a:xfrm>
           <a:prstGeom prst="rect">
             <a:avLst/>
           </a:prstGeom>
+          <a:noFill/>
+          <a:ln w="0">
+            <a:noFill/>
+          </a:ln>
         </p:spPr>
+        <p:style>
+          <a:lnRef idx="0"/>
+          <a:fillRef idx="0"/>
+          <a:effectRef idx="0"/>
+          <a:fontRef idx="minor"/>
+        </p:style>
         <p:txBody>
-          <a:bodyPr/>
-          <a:lstStyle/>
-          <a:p>
-            <a:r>
-              <a:t>Testing and Quality</a:t>
-            </a:r>
+          <a:bodyPr lIns="90000" rIns="90000" tIns="45000" bIns="45000" anchor="t">
+            <a:noAutofit/>
+          </a:bodyPr>
+          <a:p>
+            <a:pPr>
+              <a:lnSpc>
+                <a:spcPct val="100000"/>
+              </a:lnSpc>
+            </a:pPr>
+            <a:r>
+              <a:rPr lang="en-GB" sz="1800" b="0" u="none" strike="noStrike">
+                <a:solidFill>
+                  <a:srgbClr val="000000"/>
+                </a:solidFill>
+                <a:effectLst/>
+                <a:uFillTx/>
+                <a:latin typeface="Arial"/>
+              </a:rPr>
+              <a:t>API Surface</a:t>
+            </a:r>
+            <a:endParaRPr lang="en-GB" sz="1800" b="0" u="none" strike="noStrike">
+              <a:solidFill>
+                <a:srgbClr val="000000"/>
+              </a:solidFill>
+              <a:effectLst/>
+              <a:uFillTx/>
+              <a:latin typeface="Arial"/>
+            </a:endParaRPr>
           </a:p>
         </p:txBody>
       </p:sp>
       <p:sp>
         <p:nvSpPr>
-          <p:cNvPr id="3" name="Body"/>
+          <p:cNvPr id="31" name="Body"/>
           <p:cNvSpPr/>
           <p:nvPr/>
         </p:nvSpPr>
         <p:spPr>
           <a:xfrm>
             <a:off x="685800" y="1371600"/>
-            <a:ext cx="10800000" cy="4572000"/>
+            <a:ext cx="10799640" cy="4571640"/>
           </a:xfrm>
           <a:prstGeom prst="rect">
             <a:avLst/>
           </a:prstGeom>
+          <a:noFill/>
+          <a:ln w="0">
+            <a:noFill/>
+          </a:ln>
         </p:spPr>
+        <p:style>
+          <a:lnRef idx="0"/>
+          <a:fillRef idx="0"/>
+          <a:effectRef idx="0"/>
+          <a:fontRef idx="minor"/>
+        </p:style>
         <p:txBody>
-          <a:bodyPr wrap="square"/>
-          <a:lstStyle/>
-          <a:p>
-            <a:r>
-              <a:t>- Unit tests for auth, utils, ws hub</a:t>
-            </a:r>
-          </a:p>
-          <a:p>
-            <a:r>
-              <a:t>- Integration tests for servers/channels/messages</a:t>
-            </a:r>
-          </a:p>
-          <a:p>
-            <a:r>
-              <a:t>- Integration tests for invites/friends/dm</a:t>
-            </a:r>
-          </a:p>
-          <a:p>
-            <a:r>
-              <a:t>- Target coverage: 70%+</a:t>
-            </a:r>
+          <a:bodyPr lIns="90000" rIns="90000" tIns="45000" bIns="45000" anchor="t">
+            <a:noAutofit/>
+          </a:bodyPr>
+          <a:p>
+            <a:pPr>
+              <a:lnSpc>
+                <a:spcPct val="100000"/>
+              </a:lnSpc>
+            </a:pPr>
+            <a:r>
+              <a:rPr lang="en-GB" sz="1800" b="0" u="none" strike="noStrike">
+                <a:solidFill>
+                  <a:srgbClr val="000000"/>
+                </a:solidFill>
+                <a:effectLst/>
+                <a:uFillTx/>
+                <a:latin typeface="Arial"/>
+              </a:rPr>
+              <a:t>- Auth: /auth/signup, /auth/login, /auth/logout</a:t>
+            </a:r>
+            <a:endParaRPr lang="en-GB" sz="1800" b="0" u="none" strike="noStrike">
+              <a:solidFill>
+                <a:srgbClr val="000000"/>
+              </a:solidFill>
+              <a:effectLst/>
+              <a:uFillTx/>
+              <a:latin typeface="Arial"/>
+            </a:endParaRPr>
+          </a:p>
+          <a:p>
+            <a:pPr>
+              <a:lnSpc>
+                <a:spcPct val="100000"/>
+              </a:lnSpc>
+            </a:pPr>
+            <a:r>
+              <a:rPr lang="en-GB" sz="1800" b="0" u="none" strike="noStrike">
+                <a:solidFill>
+                  <a:srgbClr val="000000"/>
+                </a:solidFill>
+                <a:effectLst/>
+                <a:uFillTx/>
+                <a:latin typeface="Arial"/>
+              </a:rPr>
+              <a:t>- Servers: /servers, /servers/{id}</a:t>
+            </a:r>
+            <a:endParaRPr lang="en-GB" sz="1800" b="0" u="none" strike="noStrike">
+              <a:solidFill>
+                <a:srgbClr val="000000"/>
+              </a:solidFill>
+              <a:effectLst/>
+              <a:uFillTx/>
+              <a:latin typeface="Arial"/>
+            </a:endParaRPr>
+          </a:p>
+          <a:p>
+            <a:pPr>
+              <a:lnSpc>
+                <a:spcPct val="100000"/>
+              </a:lnSpc>
+            </a:pPr>
+            <a:r>
+              <a:rPr lang="en-GB" sz="1800" b="0" u="none" strike="noStrike">
+                <a:solidFill>
+                  <a:srgbClr val="000000"/>
+                </a:solidFill>
+                <a:effectLst/>
+                <a:uFillTx/>
+                <a:latin typeface="Arial"/>
+              </a:rPr>
+              <a:t>- Channels: /servers/{id}/channels</a:t>
+            </a:r>
+            <a:endParaRPr lang="en-GB" sz="1800" b="0" u="none" strike="noStrike">
+              <a:solidFill>
+                <a:srgbClr val="000000"/>
+              </a:solidFill>
+              <a:effectLst/>
+              <a:uFillTx/>
+              <a:latin typeface="Arial"/>
+            </a:endParaRPr>
+          </a:p>
+          <a:p>
+            <a:pPr>
+              <a:lnSpc>
+                <a:spcPct val="100000"/>
+              </a:lnSpc>
+            </a:pPr>
+            <a:r>
+              <a:rPr lang="en-GB" sz="1800" b="0" u="none" strike="noStrike">
+                <a:solidFill>
+                  <a:srgbClr val="000000"/>
+                </a:solidFill>
+                <a:effectLst/>
+                <a:uFillTx/>
+                <a:latin typeface="Arial"/>
+              </a:rPr>
+              <a:t>- Messages: /channels/{id}/messages</a:t>
+            </a:r>
+            <a:endParaRPr lang="en-GB" sz="1800" b="0" u="none" strike="noStrike">
+              <a:solidFill>
+                <a:srgbClr val="000000"/>
+              </a:solidFill>
+              <a:effectLst/>
+              <a:uFillTx/>
+              <a:latin typeface="Arial"/>
+            </a:endParaRPr>
+          </a:p>
+          <a:p>
+            <a:pPr>
+              <a:lnSpc>
+                <a:spcPct val="100000"/>
+              </a:lnSpc>
+            </a:pPr>
+            <a:r>
+              <a:rPr lang="en-GB" sz="1800" b="0" u="none" strike="noStrike">
+                <a:solidFill>
+                  <a:srgbClr val="000000"/>
+                </a:solidFill>
+                <a:effectLst/>
+                <a:uFillTx/>
+                <a:latin typeface="Arial"/>
+              </a:rPr>
+              <a:t>- WS: /ws?token=JWT</a:t>
+            </a:r>
+            <a:endParaRPr lang="en-GB" sz="1800" b="0" u="none" strike="noStrike">
+              <a:solidFill>
+                <a:srgbClr val="000000"/>
+              </a:solidFill>
+              <a:effectLst/>
+              <a:uFillTx/>
+              <a:latin typeface="Arial"/>
+            </a:endParaRPr>
           </a:p>
         </p:txBody>
       </p:sp>
     </p:spTree>
   </p:cSld>
-  <p:clrMapOvr>
-    <a:masterClrMapping/>
-  </p:clrMapOvr>
+  <mc:AlternateContent>
+    <mc:Choice Requires="p14">
+      <p:transition spd="slow" p14:dur="2000"/>
+    </mc:Choice>
+    <mc:Fallback>
+      <p:transition spd="slow"/>
+    </mc:Fallback>
+  </mc:AlternateContent>
 </p:sld>
 </file>
 
-<file path=ppt/slides/slide14.xml><?xml version="1.0" encoding="utf-8"?>
-<p:sld xmlns:a="http://schemas.openxmlformats.org/drawingml/2006/main" xmlns:r="http://schemas.openxmlformats.org/officeDocument/2006/relationships" xmlns:p="http://schemas.openxmlformats.org/presentationml/2006/main">
+<file path=ppt/slides/slide13.xml><?xml version="1.0" encoding="utf-8"?>
+<p:sld xmlns:a="http://schemas.openxmlformats.org/drawingml/2006/main" xmlns:p="http://schemas.openxmlformats.org/presentationml/2006/main" xmlns:r="http://schemas.openxmlformats.org/officeDocument/2006/relationships" xmlns:p14="http://schemas.microsoft.com/office/powerpoint/2010/main" xmlns:p15="http://schemas.microsoft.com/office/powerpoint/2012/main" xmlns:mc="http://schemas.openxmlformats.org/markup-compatibility/2006">
   <p:cSld>
     <p:spTree>
       <p:nvGrpSpPr>
@@ -560,79 +1433,211 @@
       </p:grpSpPr>
       <p:sp>
         <p:nvSpPr>
-          <p:cNvPr id="2" name="Title"/>
+          <p:cNvPr id="32" name="Title"/>
           <p:cNvSpPr/>
           <p:nvPr/>
         </p:nvSpPr>
         <p:spPr>
           <a:xfrm>
             <a:off x="457200" y="228600"/>
-            <a:ext cx="11176000" cy="685800"/>
+            <a:ext cx="11175480" cy="685440"/>
           </a:xfrm>
           <a:prstGeom prst="rect">
             <a:avLst/>
           </a:prstGeom>
+          <a:noFill/>
+          <a:ln w="0">
+            <a:noFill/>
+          </a:ln>
         </p:spPr>
+        <p:style>
+          <a:lnRef idx="0"/>
+          <a:fillRef idx="0"/>
+          <a:effectRef idx="0"/>
+          <a:fontRef idx="minor"/>
+        </p:style>
         <p:txBody>
-          <a:bodyPr/>
-          <a:lstStyle/>
-          <a:p>
-            <a:r>
-              <a:t>Deployment and Config</a:t>
-            </a:r>
+          <a:bodyPr lIns="90000" rIns="90000" tIns="45000" bIns="45000" anchor="t">
+            <a:noAutofit/>
+          </a:bodyPr>
+          <a:p>
+            <a:pPr>
+              <a:lnSpc>
+                <a:spcPct val="100000"/>
+              </a:lnSpc>
+            </a:pPr>
+            <a:r>
+              <a:rPr lang="en-GB" sz="1800" b="0" u="none" strike="noStrike">
+                <a:solidFill>
+                  <a:srgbClr val="000000"/>
+                </a:solidFill>
+                <a:effectLst/>
+                <a:uFillTx/>
+                <a:latin typeface="Arial"/>
+              </a:rPr>
+              <a:t>Data Model</a:t>
+            </a:r>
+            <a:endParaRPr lang="en-GB" sz="1800" b="0" u="none" strike="noStrike">
+              <a:solidFill>
+                <a:srgbClr val="000000"/>
+              </a:solidFill>
+              <a:effectLst/>
+              <a:uFillTx/>
+              <a:latin typeface="Arial"/>
+            </a:endParaRPr>
           </a:p>
         </p:txBody>
       </p:sp>
       <p:sp>
         <p:nvSpPr>
-          <p:cNvPr id="3" name="Body"/>
+          <p:cNvPr id="33" name="Body"/>
           <p:cNvSpPr/>
           <p:nvPr/>
         </p:nvSpPr>
         <p:spPr>
           <a:xfrm>
             <a:off x="685800" y="1371600"/>
-            <a:ext cx="10800000" cy="4572000"/>
+            <a:ext cx="10799640" cy="4571640"/>
           </a:xfrm>
           <a:prstGeom prst="rect">
             <a:avLst/>
           </a:prstGeom>
+          <a:noFill/>
+          <a:ln w="0">
+            <a:noFill/>
+          </a:ln>
         </p:spPr>
+        <p:style>
+          <a:lnRef idx="0"/>
+          <a:fillRef idx="0"/>
+          <a:effectRef idx="0"/>
+          <a:fontRef idx="minor"/>
+        </p:style>
         <p:txBody>
-          <a:bodyPr wrap="square"/>
-          <a:lstStyle/>
-          <a:p>
-            <a:r>
-              <a:t>- Backend env: DATABASE_URL, JWT_SECRET, BIND_ADDR</a:t>
-            </a:r>
-          </a:p>
-          <a:p>
-            <a:r>
-              <a:t>- Frontend env: BACKEND_URL</a:t>
-            </a:r>
-          </a:p>
-          <a:p>
-            <a:r>
-              <a:t>- Railway for Postgres</a:t>
-            </a:r>
-          </a:p>
-          <a:p>
-            <a:r>
-              <a:t>- Ports: 3000 (front), 3001 (back)</a:t>
-            </a:r>
+          <a:bodyPr lIns="90000" rIns="90000" tIns="45000" bIns="45000" anchor="t">
+            <a:noAutofit/>
+          </a:bodyPr>
+          <a:p>
+            <a:pPr>
+              <a:lnSpc>
+                <a:spcPct val="100000"/>
+              </a:lnSpc>
+            </a:pPr>
+            <a:r>
+              <a:rPr lang="en-GB" sz="1800" b="0" u="none" strike="noStrike">
+                <a:solidFill>
+                  <a:srgbClr val="000000"/>
+                </a:solidFill>
+                <a:effectLst/>
+                <a:uFillTx/>
+                <a:latin typeface="Arial"/>
+              </a:rPr>
+              <a:t>- users, servers, channels, messages</a:t>
+            </a:r>
+            <a:endParaRPr lang="en-GB" sz="1800" b="0" u="none" strike="noStrike">
+              <a:solidFill>
+                <a:srgbClr val="000000"/>
+              </a:solidFill>
+              <a:effectLst/>
+              <a:uFillTx/>
+              <a:latin typeface="Arial"/>
+            </a:endParaRPr>
+          </a:p>
+          <a:p>
+            <a:pPr>
+              <a:lnSpc>
+                <a:spcPct val="100000"/>
+              </a:lnSpc>
+            </a:pPr>
+            <a:r>
+              <a:rPr lang="en-GB" sz="1800" b="0" u="none" strike="noStrike">
+                <a:solidFill>
+                  <a:srgbClr val="000000"/>
+                </a:solidFill>
+                <a:effectLst/>
+                <a:uFillTx/>
+                <a:latin typeface="Arial"/>
+              </a:rPr>
+              <a:t>- server_members, invites, reactions</a:t>
+            </a:r>
+            <a:endParaRPr lang="en-GB" sz="1800" b="0" u="none" strike="noStrike">
+              <a:solidFill>
+                <a:srgbClr val="000000"/>
+              </a:solidFill>
+              <a:effectLst/>
+              <a:uFillTx/>
+              <a:latin typeface="Arial"/>
+            </a:endParaRPr>
+          </a:p>
+          <a:p>
+            <a:pPr>
+              <a:lnSpc>
+                <a:spcPct val="100000"/>
+              </a:lnSpc>
+            </a:pPr>
+            <a:r>
+              <a:rPr lang="en-GB" sz="1800" b="0" u="none" strike="noStrike">
+                <a:solidFill>
+                  <a:srgbClr val="000000"/>
+                </a:solidFill>
+                <a:effectLst/>
+                <a:uFillTx/>
+                <a:latin typeface="Arial"/>
+              </a:rPr>
+              <a:t>- direct_conversations, direct_messages</a:t>
+            </a:r>
+            <a:endParaRPr lang="en-GB" sz="1800" b="0" u="none" strike="noStrike">
+              <a:solidFill>
+                <a:srgbClr val="000000"/>
+              </a:solidFill>
+              <a:effectLst/>
+              <a:uFillTx/>
+              <a:latin typeface="Arial"/>
+            </a:endParaRPr>
+          </a:p>
+          <a:p>
+            <a:pPr>
+              <a:lnSpc>
+                <a:spcPct val="100000"/>
+              </a:lnSpc>
+            </a:pPr>
+            <a:r>
+              <a:rPr lang="en-GB" sz="1800" b="0" u="none" strike="noStrike">
+                <a:solidFill>
+                  <a:srgbClr val="000000"/>
+                </a:solidFill>
+                <a:effectLst/>
+                <a:uFillTx/>
+                <a:latin typeface="Arial"/>
+              </a:rPr>
+              <a:t>- friend_requests</a:t>
+            </a:r>
+            <a:endParaRPr lang="en-GB" sz="1800" b="0" u="none" strike="noStrike">
+              <a:solidFill>
+                <a:srgbClr val="000000"/>
+              </a:solidFill>
+              <a:effectLst/>
+              <a:uFillTx/>
+              <a:latin typeface="Arial"/>
+            </a:endParaRPr>
           </a:p>
         </p:txBody>
       </p:sp>
     </p:spTree>
   </p:cSld>
-  <p:clrMapOvr>
-    <a:masterClrMapping/>
-  </p:clrMapOvr>
+  <mc:AlternateContent>
+    <mc:Choice Requires="p14">
+      <p:transition spd="slow" p14:dur="2000"/>
+    </mc:Choice>
+    <mc:Fallback>
+      <p:transition spd="slow"/>
+    </mc:Fallback>
+  </mc:AlternateContent>
 </p:sld>
 </file>
 
-<file path=ppt/slides/slide15.xml><?xml version="1.0" encoding="utf-8"?>
-<p:sld xmlns:a="http://schemas.openxmlformats.org/drawingml/2006/main" xmlns:r="http://schemas.openxmlformats.org/officeDocument/2006/relationships" xmlns:p="http://schemas.openxmlformats.org/presentationml/2006/main">
+<file path=ppt/slides/slide14.xml><?xml version="1.0" encoding="utf-8"?>
+<p:sld xmlns:a="http://schemas.openxmlformats.org/drawingml/2006/main" xmlns:p="http://schemas.openxmlformats.org/presentationml/2006/main" xmlns:r="http://schemas.openxmlformats.org/officeDocument/2006/relationships" xmlns:p14="http://schemas.microsoft.com/office/powerpoint/2010/main" xmlns:p15="http://schemas.microsoft.com/office/powerpoint/2012/main" xmlns:mc="http://schemas.openxmlformats.org/markup-compatibility/2006">
   <p:cSld>
     <p:spTree>
       <p:nvGrpSpPr>
@@ -650,79 +1655,211 @@
       </p:grpSpPr>
       <p:sp>
         <p:nvSpPr>
-          <p:cNvPr id="2" name="Title"/>
+          <p:cNvPr id="34" name="Title"/>
           <p:cNvSpPr/>
           <p:nvPr/>
         </p:nvSpPr>
         <p:spPr>
           <a:xfrm>
             <a:off x="457200" y="228600"/>
-            <a:ext cx="11176000" cy="685800"/>
+            <a:ext cx="11175480" cy="685440"/>
           </a:xfrm>
           <a:prstGeom prst="rect">
             <a:avLst/>
           </a:prstGeom>
+          <a:noFill/>
+          <a:ln w="0">
+            <a:noFill/>
+          </a:ln>
         </p:spPr>
+        <p:style>
+          <a:lnRef idx="0"/>
+          <a:fillRef idx="0"/>
+          <a:effectRef idx="0"/>
+          <a:fontRef idx="minor"/>
+        </p:style>
         <p:txBody>
-          <a:bodyPr/>
-          <a:lstStyle/>
-          <a:p>
-            <a:r>
-              <a:t>UI/UX Highlights</a:t>
-            </a:r>
+          <a:bodyPr lIns="90000" rIns="90000" tIns="45000" bIns="45000" anchor="t">
+            <a:noAutofit/>
+          </a:bodyPr>
+          <a:p>
+            <a:pPr>
+              <a:lnSpc>
+                <a:spcPct val="100000"/>
+              </a:lnSpc>
+            </a:pPr>
+            <a:r>
+              <a:rPr lang="en-GB" sz="1800" b="0" u="none" strike="noStrike">
+                <a:solidFill>
+                  <a:srgbClr val="000000"/>
+                </a:solidFill>
+                <a:effectLst/>
+                <a:uFillTx/>
+                <a:latin typeface="Arial"/>
+              </a:rPr>
+              <a:t>Testing and Quality</a:t>
+            </a:r>
+            <a:endParaRPr lang="en-GB" sz="1800" b="0" u="none" strike="noStrike">
+              <a:solidFill>
+                <a:srgbClr val="000000"/>
+              </a:solidFill>
+              <a:effectLst/>
+              <a:uFillTx/>
+              <a:latin typeface="Arial"/>
+            </a:endParaRPr>
           </a:p>
         </p:txBody>
       </p:sp>
       <p:sp>
         <p:nvSpPr>
-          <p:cNvPr id="3" name="Body"/>
+          <p:cNvPr id="35" name="Body"/>
           <p:cNvSpPr/>
           <p:nvPr/>
         </p:nvSpPr>
         <p:spPr>
           <a:xfrm>
             <a:off x="685800" y="1371600"/>
-            <a:ext cx="10800000" cy="4572000"/>
+            <a:ext cx="10799640" cy="4571640"/>
           </a:xfrm>
           <a:prstGeom prst="rect">
             <a:avLst/>
           </a:prstGeom>
+          <a:noFill/>
+          <a:ln w="0">
+            <a:noFill/>
+          </a:ln>
         </p:spPr>
+        <p:style>
+          <a:lnRef idx="0"/>
+          <a:fillRef idx="0"/>
+          <a:effectRef idx="0"/>
+          <a:fontRef idx="minor"/>
+        </p:style>
         <p:txBody>
-          <a:bodyPr wrap="square"/>
-          <a:lstStyle/>
-          <a:p>
-            <a:r>
-              <a:t>- Discord-like layout</a:t>
-            </a:r>
-          </a:p>
-          <a:p>
-            <a:r>
-              <a:t>- Server list + channel sidebar</a:t>
-            </a:r>
-          </a:p>
-          <a:p>
-            <a:r>
-              <a:t>- DM list + friends page</a:t>
-            </a:r>
-          </a:p>
-          <a:p>
-            <a:r>
-              <a:t>- Status control + notifications</a:t>
-            </a:r>
+          <a:bodyPr lIns="90000" rIns="90000" tIns="45000" bIns="45000" anchor="t">
+            <a:noAutofit/>
+          </a:bodyPr>
+          <a:p>
+            <a:pPr>
+              <a:lnSpc>
+                <a:spcPct val="100000"/>
+              </a:lnSpc>
+            </a:pPr>
+            <a:r>
+              <a:rPr lang="en-GB" sz="1800" b="0" u="none" strike="noStrike">
+                <a:solidFill>
+                  <a:srgbClr val="000000"/>
+                </a:solidFill>
+                <a:effectLst/>
+                <a:uFillTx/>
+                <a:latin typeface="Arial"/>
+              </a:rPr>
+              <a:t>- Unit tests for auth, utils, ws hub</a:t>
+            </a:r>
+            <a:endParaRPr lang="en-GB" sz="1800" b="0" u="none" strike="noStrike">
+              <a:solidFill>
+                <a:srgbClr val="000000"/>
+              </a:solidFill>
+              <a:effectLst/>
+              <a:uFillTx/>
+              <a:latin typeface="Arial"/>
+            </a:endParaRPr>
+          </a:p>
+          <a:p>
+            <a:pPr>
+              <a:lnSpc>
+                <a:spcPct val="100000"/>
+              </a:lnSpc>
+            </a:pPr>
+            <a:r>
+              <a:rPr lang="en-GB" sz="1800" b="0" u="none" strike="noStrike">
+                <a:solidFill>
+                  <a:srgbClr val="000000"/>
+                </a:solidFill>
+                <a:effectLst/>
+                <a:uFillTx/>
+                <a:latin typeface="Arial"/>
+              </a:rPr>
+              <a:t>- Integration tests for servers/channels/messages</a:t>
+            </a:r>
+            <a:endParaRPr lang="en-GB" sz="1800" b="0" u="none" strike="noStrike">
+              <a:solidFill>
+                <a:srgbClr val="000000"/>
+              </a:solidFill>
+              <a:effectLst/>
+              <a:uFillTx/>
+              <a:latin typeface="Arial"/>
+            </a:endParaRPr>
+          </a:p>
+          <a:p>
+            <a:pPr>
+              <a:lnSpc>
+                <a:spcPct val="100000"/>
+              </a:lnSpc>
+            </a:pPr>
+            <a:r>
+              <a:rPr lang="en-GB" sz="1800" b="0" u="none" strike="noStrike">
+                <a:solidFill>
+                  <a:srgbClr val="000000"/>
+                </a:solidFill>
+                <a:effectLst/>
+                <a:uFillTx/>
+                <a:latin typeface="Arial"/>
+              </a:rPr>
+              <a:t>- Integration tests for invites/friends/dm</a:t>
+            </a:r>
+            <a:endParaRPr lang="en-GB" sz="1800" b="0" u="none" strike="noStrike">
+              <a:solidFill>
+                <a:srgbClr val="000000"/>
+              </a:solidFill>
+              <a:effectLst/>
+              <a:uFillTx/>
+              <a:latin typeface="Arial"/>
+            </a:endParaRPr>
+          </a:p>
+          <a:p>
+            <a:pPr>
+              <a:lnSpc>
+                <a:spcPct val="100000"/>
+              </a:lnSpc>
+            </a:pPr>
+            <a:r>
+              <a:rPr lang="en-GB" sz="1800" b="0" u="none" strike="noStrike">
+                <a:solidFill>
+                  <a:srgbClr val="000000"/>
+                </a:solidFill>
+                <a:effectLst/>
+                <a:uFillTx/>
+                <a:latin typeface="Arial"/>
+              </a:rPr>
+              <a:t>- Target coverage: 70%+</a:t>
+            </a:r>
+            <a:endParaRPr lang="en-GB" sz="1800" b="0" u="none" strike="noStrike">
+              <a:solidFill>
+                <a:srgbClr val="000000"/>
+              </a:solidFill>
+              <a:effectLst/>
+              <a:uFillTx/>
+              <a:latin typeface="Arial"/>
+            </a:endParaRPr>
           </a:p>
         </p:txBody>
       </p:sp>
     </p:spTree>
   </p:cSld>
-  <p:clrMapOvr>
-    <a:masterClrMapping/>
-  </p:clrMapOvr>
+  <mc:AlternateContent>
+    <mc:Choice Requires="p14">
+      <p:transition spd="slow" p14:dur="2000"/>
+    </mc:Choice>
+    <mc:Fallback>
+      <p:transition spd="slow"/>
+    </mc:Fallback>
+  </mc:AlternateContent>
 </p:sld>
 </file>
 
-<file path=ppt/slides/slide16.xml><?xml version="1.0" encoding="utf-8"?>
-<p:sld xmlns:a="http://schemas.openxmlformats.org/drawingml/2006/main" xmlns:r="http://schemas.openxmlformats.org/officeDocument/2006/relationships" xmlns:p="http://schemas.openxmlformats.org/presentationml/2006/main">
+<file path=ppt/slides/slide15.xml><?xml version="1.0" encoding="utf-8"?>
+<p:sld xmlns:a="http://schemas.openxmlformats.org/drawingml/2006/main" xmlns:p="http://schemas.openxmlformats.org/presentationml/2006/main" xmlns:r="http://schemas.openxmlformats.org/officeDocument/2006/relationships" xmlns:p14="http://schemas.microsoft.com/office/powerpoint/2010/main" xmlns:p15="http://schemas.microsoft.com/office/powerpoint/2012/main" xmlns:mc="http://schemas.openxmlformats.org/markup-compatibility/2006">
   <p:cSld>
     <p:spTree>
       <p:nvGrpSpPr>
@@ -740,79 +1877,211 @@
       </p:grpSpPr>
       <p:sp>
         <p:nvSpPr>
-          <p:cNvPr id="2" name="Title"/>
+          <p:cNvPr id="36" name="Title"/>
           <p:cNvSpPr/>
           <p:nvPr/>
         </p:nvSpPr>
         <p:spPr>
           <a:xfrm>
             <a:off x="457200" y="228600"/>
-            <a:ext cx="11176000" cy="685800"/>
+            <a:ext cx="11175480" cy="685440"/>
           </a:xfrm>
           <a:prstGeom prst="rect">
             <a:avLst/>
           </a:prstGeom>
+          <a:noFill/>
+          <a:ln w="0">
+            <a:noFill/>
+          </a:ln>
         </p:spPr>
+        <p:style>
+          <a:lnRef idx="0"/>
+          <a:fillRef idx="0"/>
+          <a:effectRef idx="0"/>
+          <a:fontRef idx="minor"/>
+        </p:style>
         <p:txBody>
-          <a:bodyPr/>
-          <a:lstStyle/>
-          <a:p>
-            <a:r>
-              <a:t>Demo Flow</a:t>
-            </a:r>
+          <a:bodyPr lIns="90000" rIns="90000" tIns="45000" bIns="45000" anchor="t">
+            <a:noAutofit/>
+          </a:bodyPr>
+          <a:p>
+            <a:pPr>
+              <a:lnSpc>
+                <a:spcPct val="100000"/>
+              </a:lnSpc>
+            </a:pPr>
+            <a:r>
+              <a:rPr lang="en-GB" sz="1800" b="0" u="none" strike="noStrike">
+                <a:solidFill>
+                  <a:srgbClr val="000000"/>
+                </a:solidFill>
+                <a:effectLst/>
+                <a:uFillTx/>
+                <a:latin typeface="Arial"/>
+              </a:rPr>
+              <a:t>Deployment and Config</a:t>
+            </a:r>
+            <a:endParaRPr lang="en-GB" sz="1800" b="0" u="none" strike="noStrike">
+              <a:solidFill>
+                <a:srgbClr val="000000"/>
+              </a:solidFill>
+              <a:effectLst/>
+              <a:uFillTx/>
+              <a:latin typeface="Arial"/>
+            </a:endParaRPr>
           </a:p>
         </p:txBody>
       </p:sp>
       <p:sp>
         <p:nvSpPr>
-          <p:cNvPr id="3" name="Body"/>
+          <p:cNvPr id="37" name="Body"/>
           <p:cNvSpPr/>
           <p:nvPr/>
         </p:nvSpPr>
         <p:spPr>
           <a:xfrm>
             <a:off x="685800" y="1371600"/>
-            <a:ext cx="10800000" cy="4572000"/>
+            <a:ext cx="10799640" cy="4571640"/>
           </a:xfrm>
           <a:prstGeom prst="rect">
             <a:avLst/>
           </a:prstGeom>
+          <a:noFill/>
+          <a:ln w="0">
+            <a:noFill/>
+          </a:ln>
         </p:spPr>
+        <p:style>
+          <a:lnRef idx="0"/>
+          <a:fillRef idx="0"/>
+          <a:effectRef idx="0"/>
+          <a:fontRef idx="minor"/>
+        </p:style>
         <p:txBody>
-          <a:bodyPr wrap="square"/>
-          <a:lstStyle/>
-          <a:p>
-            <a:r>
-              <a:t>- Signup/login</a:t>
-            </a:r>
-          </a:p>
-          <a:p>
-            <a:r>
-              <a:t>- Create server and channel</a:t>
-            </a:r>
-          </a:p>
-          <a:p>
-            <a:r>
-              <a:t>- Invite friend and chat</a:t>
-            </a:r>
-          </a:p>
-          <a:p>
-            <a:r>
-              <a:t>- Direct message and edit/delete</a:t>
-            </a:r>
+          <a:bodyPr lIns="90000" rIns="90000" tIns="45000" bIns="45000" anchor="t">
+            <a:noAutofit/>
+          </a:bodyPr>
+          <a:p>
+            <a:pPr>
+              <a:lnSpc>
+                <a:spcPct val="100000"/>
+              </a:lnSpc>
+            </a:pPr>
+            <a:r>
+              <a:rPr lang="en-GB" sz="1800" b="0" u="none" strike="noStrike">
+                <a:solidFill>
+                  <a:srgbClr val="000000"/>
+                </a:solidFill>
+                <a:effectLst/>
+                <a:uFillTx/>
+                <a:latin typeface="Arial"/>
+              </a:rPr>
+              <a:t>- Backend env: DATABASE_URL, JWT_SECRET, BIND_ADDR</a:t>
+            </a:r>
+            <a:endParaRPr lang="en-GB" sz="1800" b="0" u="none" strike="noStrike">
+              <a:solidFill>
+                <a:srgbClr val="000000"/>
+              </a:solidFill>
+              <a:effectLst/>
+              <a:uFillTx/>
+              <a:latin typeface="Arial"/>
+            </a:endParaRPr>
+          </a:p>
+          <a:p>
+            <a:pPr>
+              <a:lnSpc>
+                <a:spcPct val="100000"/>
+              </a:lnSpc>
+            </a:pPr>
+            <a:r>
+              <a:rPr lang="en-GB" sz="1800" b="0" u="none" strike="noStrike">
+                <a:solidFill>
+                  <a:srgbClr val="000000"/>
+                </a:solidFill>
+                <a:effectLst/>
+                <a:uFillTx/>
+                <a:latin typeface="Arial"/>
+              </a:rPr>
+              <a:t>- Frontend env: BACKEND_URL</a:t>
+            </a:r>
+            <a:endParaRPr lang="en-GB" sz="1800" b="0" u="none" strike="noStrike">
+              <a:solidFill>
+                <a:srgbClr val="000000"/>
+              </a:solidFill>
+              <a:effectLst/>
+              <a:uFillTx/>
+              <a:latin typeface="Arial"/>
+            </a:endParaRPr>
+          </a:p>
+          <a:p>
+            <a:pPr>
+              <a:lnSpc>
+                <a:spcPct val="100000"/>
+              </a:lnSpc>
+            </a:pPr>
+            <a:r>
+              <a:rPr lang="en-GB" sz="1800" b="0" u="none" strike="noStrike">
+                <a:solidFill>
+                  <a:srgbClr val="000000"/>
+                </a:solidFill>
+                <a:effectLst/>
+                <a:uFillTx/>
+                <a:latin typeface="Arial"/>
+              </a:rPr>
+              <a:t>- Railway for Postgres</a:t>
+            </a:r>
+            <a:endParaRPr lang="en-GB" sz="1800" b="0" u="none" strike="noStrike">
+              <a:solidFill>
+                <a:srgbClr val="000000"/>
+              </a:solidFill>
+              <a:effectLst/>
+              <a:uFillTx/>
+              <a:latin typeface="Arial"/>
+            </a:endParaRPr>
+          </a:p>
+          <a:p>
+            <a:pPr>
+              <a:lnSpc>
+                <a:spcPct val="100000"/>
+              </a:lnSpc>
+            </a:pPr>
+            <a:r>
+              <a:rPr lang="en-GB" sz="1800" b="0" u="none" strike="noStrike">
+                <a:solidFill>
+                  <a:srgbClr val="000000"/>
+                </a:solidFill>
+                <a:effectLst/>
+                <a:uFillTx/>
+                <a:latin typeface="Arial"/>
+              </a:rPr>
+              <a:t>- Ports: 3000 (front), 3001 (back)</a:t>
+            </a:r>
+            <a:endParaRPr lang="en-GB" sz="1800" b="0" u="none" strike="noStrike">
+              <a:solidFill>
+                <a:srgbClr val="000000"/>
+              </a:solidFill>
+              <a:effectLst/>
+              <a:uFillTx/>
+              <a:latin typeface="Arial"/>
+            </a:endParaRPr>
           </a:p>
         </p:txBody>
       </p:sp>
     </p:spTree>
   </p:cSld>
-  <p:clrMapOvr>
-    <a:masterClrMapping/>
-  </p:clrMapOvr>
+  <mc:AlternateContent>
+    <mc:Choice Requires="p14">
+      <p:transition spd="slow" p14:dur="2000"/>
+    </mc:Choice>
+    <mc:Fallback>
+      <p:transition spd="slow"/>
+    </mc:Fallback>
+  </mc:AlternateContent>
 </p:sld>
 </file>
 
-<file path=ppt/slides/slide17.xml><?xml version="1.0" encoding="utf-8"?>
-<p:sld xmlns:a="http://schemas.openxmlformats.org/drawingml/2006/main" xmlns:r="http://schemas.openxmlformats.org/officeDocument/2006/relationships" xmlns:p="http://schemas.openxmlformats.org/presentationml/2006/main">
+<file path=ppt/slides/slide16.xml><?xml version="1.0" encoding="utf-8"?>
+<p:sld xmlns:a="http://schemas.openxmlformats.org/drawingml/2006/main" xmlns:p="http://schemas.openxmlformats.org/presentationml/2006/main" xmlns:r="http://schemas.openxmlformats.org/officeDocument/2006/relationships" xmlns:p14="http://schemas.microsoft.com/office/powerpoint/2010/main" xmlns:p15="http://schemas.microsoft.com/office/powerpoint/2012/main" xmlns:mc="http://schemas.openxmlformats.org/markup-compatibility/2006">
   <p:cSld>
     <p:spTree>
       <p:nvGrpSpPr>
@@ -830,74 +2099,211 @@
       </p:grpSpPr>
       <p:sp>
         <p:nvSpPr>
-          <p:cNvPr id="2" name="Title"/>
+          <p:cNvPr id="38" name="Title"/>
           <p:cNvSpPr/>
           <p:nvPr/>
         </p:nvSpPr>
         <p:spPr>
           <a:xfrm>
             <a:off x="457200" y="228600"/>
-            <a:ext cx="11176000" cy="685800"/>
+            <a:ext cx="11175480" cy="685440"/>
           </a:xfrm>
           <a:prstGeom prst="rect">
             <a:avLst/>
           </a:prstGeom>
+          <a:noFill/>
+          <a:ln w="0">
+            <a:noFill/>
+          </a:ln>
         </p:spPr>
+        <p:style>
+          <a:lnRef idx="0"/>
+          <a:fillRef idx="0"/>
+          <a:effectRef idx="0"/>
+          <a:fontRef idx="minor"/>
+        </p:style>
         <p:txBody>
-          <a:bodyPr/>
-          <a:lstStyle/>
-          <a:p>
-            <a:r>
-              <a:t>Roadmap</a:t>
-            </a:r>
+          <a:bodyPr lIns="90000" rIns="90000" tIns="45000" bIns="45000" anchor="t">
+            <a:noAutofit/>
+          </a:bodyPr>
+          <a:p>
+            <a:pPr>
+              <a:lnSpc>
+                <a:spcPct val="100000"/>
+              </a:lnSpc>
+            </a:pPr>
+            <a:r>
+              <a:rPr lang="en-GB" sz="1800" b="0" u="none" strike="noStrike">
+                <a:solidFill>
+                  <a:srgbClr val="000000"/>
+                </a:solidFill>
+                <a:effectLst/>
+                <a:uFillTx/>
+                <a:latin typeface="Arial"/>
+              </a:rPr>
+              <a:t>UI/UX Highlights</a:t>
+            </a:r>
+            <a:endParaRPr lang="en-GB" sz="1800" b="0" u="none" strike="noStrike">
+              <a:solidFill>
+                <a:srgbClr val="000000"/>
+              </a:solidFill>
+              <a:effectLst/>
+              <a:uFillTx/>
+              <a:latin typeface="Arial"/>
+            </a:endParaRPr>
           </a:p>
         </p:txBody>
       </p:sp>
       <p:sp>
         <p:nvSpPr>
-          <p:cNvPr id="3" name="Body"/>
+          <p:cNvPr id="39" name="Body"/>
           <p:cNvSpPr/>
           <p:nvPr/>
         </p:nvSpPr>
         <p:spPr>
           <a:xfrm>
             <a:off x="685800" y="1371600"/>
-            <a:ext cx="10800000" cy="4572000"/>
+            <a:ext cx="10799640" cy="4571640"/>
           </a:xfrm>
           <a:prstGeom prst="rect">
             <a:avLst/>
           </a:prstGeom>
+          <a:noFill/>
+          <a:ln w="0">
+            <a:noFill/>
+          </a:ln>
         </p:spPr>
+        <p:style>
+          <a:lnRef idx="0"/>
+          <a:fillRef idx="0"/>
+          <a:effectRef idx="0"/>
+          <a:fontRef idx="minor"/>
+        </p:style>
         <p:txBody>
-          <a:bodyPr wrap="square"/>
-          <a:lstStyle/>
-          <a:p>
-            <a:r>
-              <a:t>- Role management UI</a:t>
-            </a:r>
-          </a:p>
-          <a:p>
-            <a:r>
-              <a:t>- File sharing + reactions UI</a:t>
-            </a:r>
-          </a:p>
-          <a:p>
-            <a:r>
-              <a:t>- Search and message history paging</a:t>
-            </a:r>
+          <a:bodyPr lIns="90000" rIns="90000" tIns="45000" bIns="45000" anchor="t">
+            <a:noAutofit/>
+          </a:bodyPr>
+          <a:p>
+            <a:pPr>
+              <a:lnSpc>
+                <a:spcPct val="100000"/>
+              </a:lnSpc>
+            </a:pPr>
+            <a:r>
+              <a:rPr lang="en-GB" sz="1800" b="0" u="none" strike="noStrike">
+                <a:solidFill>
+                  <a:srgbClr val="000000"/>
+                </a:solidFill>
+                <a:effectLst/>
+                <a:uFillTx/>
+                <a:latin typeface="Arial"/>
+              </a:rPr>
+              <a:t>- Discord-like layout</a:t>
+            </a:r>
+            <a:endParaRPr lang="en-GB" sz="1800" b="0" u="none" strike="noStrike">
+              <a:solidFill>
+                <a:srgbClr val="000000"/>
+              </a:solidFill>
+              <a:effectLst/>
+              <a:uFillTx/>
+              <a:latin typeface="Arial"/>
+            </a:endParaRPr>
+          </a:p>
+          <a:p>
+            <a:pPr>
+              <a:lnSpc>
+                <a:spcPct val="100000"/>
+              </a:lnSpc>
+            </a:pPr>
+            <a:r>
+              <a:rPr lang="en-GB" sz="1800" b="0" u="none" strike="noStrike">
+                <a:solidFill>
+                  <a:srgbClr val="000000"/>
+                </a:solidFill>
+                <a:effectLst/>
+                <a:uFillTx/>
+                <a:latin typeface="Arial"/>
+              </a:rPr>
+              <a:t>- Server list + channel sidebar</a:t>
+            </a:r>
+            <a:endParaRPr lang="en-GB" sz="1800" b="0" u="none" strike="noStrike">
+              <a:solidFill>
+                <a:srgbClr val="000000"/>
+              </a:solidFill>
+              <a:effectLst/>
+              <a:uFillTx/>
+              <a:latin typeface="Arial"/>
+            </a:endParaRPr>
+          </a:p>
+          <a:p>
+            <a:pPr>
+              <a:lnSpc>
+                <a:spcPct val="100000"/>
+              </a:lnSpc>
+            </a:pPr>
+            <a:r>
+              <a:rPr lang="en-GB" sz="1800" b="0" u="none" strike="noStrike">
+                <a:solidFill>
+                  <a:srgbClr val="000000"/>
+                </a:solidFill>
+                <a:effectLst/>
+                <a:uFillTx/>
+                <a:latin typeface="Arial"/>
+              </a:rPr>
+              <a:t>- DM list + friends page</a:t>
+            </a:r>
+            <a:endParaRPr lang="en-GB" sz="1800" b="0" u="none" strike="noStrike">
+              <a:solidFill>
+                <a:srgbClr val="000000"/>
+              </a:solidFill>
+              <a:effectLst/>
+              <a:uFillTx/>
+              <a:latin typeface="Arial"/>
+            </a:endParaRPr>
+          </a:p>
+          <a:p>
+            <a:pPr>
+              <a:lnSpc>
+                <a:spcPct val="100000"/>
+              </a:lnSpc>
+            </a:pPr>
+            <a:r>
+              <a:rPr lang="en-GB" sz="1800" b="0" u="none" strike="noStrike">
+                <a:solidFill>
+                  <a:srgbClr val="000000"/>
+                </a:solidFill>
+                <a:effectLst/>
+                <a:uFillTx/>
+                <a:latin typeface="Arial"/>
+              </a:rPr>
+              <a:t>- Status control + notifications</a:t>
+            </a:r>
+            <a:endParaRPr lang="en-GB" sz="1800" b="0" u="none" strike="noStrike">
+              <a:solidFill>
+                <a:srgbClr val="000000"/>
+              </a:solidFill>
+              <a:effectLst/>
+              <a:uFillTx/>
+              <a:latin typeface="Arial"/>
+            </a:endParaRPr>
           </a:p>
         </p:txBody>
       </p:sp>
     </p:spTree>
   </p:cSld>
-  <p:clrMapOvr>
-    <a:masterClrMapping/>
-  </p:clrMapOvr>
+  <mc:AlternateContent>
+    <mc:Choice Requires="p14">
+      <p:transition spd="slow" p14:dur="2000"/>
+    </mc:Choice>
+    <mc:Fallback>
+      <p:transition spd="slow"/>
+    </mc:Fallback>
+  </mc:AlternateContent>
 </p:sld>
 </file>
 
-<file path=ppt/slides/slide18.xml><?xml version="1.0" encoding="utf-8"?>
-<p:sld xmlns:a="http://schemas.openxmlformats.org/drawingml/2006/main" xmlns:r="http://schemas.openxmlformats.org/officeDocument/2006/relationships" xmlns:p="http://schemas.openxmlformats.org/presentationml/2006/main">
+<file path=ppt/slides/slide17.xml><?xml version="1.0" encoding="utf-8"?>
+<p:sld xmlns:a="http://schemas.openxmlformats.org/drawingml/2006/main" xmlns:p="http://schemas.openxmlformats.org/presentationml/2006/main" xmlns:r="http://schemas.openxmlformats.org/officeDocument/2006/relationships" xmlns:p14="http://schemas.microsoft.com/office/powerpoint/2010/main" xmlns:p15="http://schemas.microsoft.com/office/powerpoint/2012/main" xmlns:mc="http://schemas.openxmlformats.org/markup-compatibility/2006">
   <p:cSld>
     <p:spTree>
       <p:nvGrpSpPr>
@@ -915,64 +2321,211 @@
       </p:grpSpPr>
       <p:sp>
         <p:nvSpPr>
-          <p:cNvPr id="2" name="Title"/>
+          <p:cNvPr id="40" name="Title"/>
           <p:cNvSpPr/>
           <p:nvPr/>
         </p:nvSpPr>
         <p:spPr>
           <a:xfrm>
             <a:off x="457200" y="228600"/>
-            <a:ext cx="11176000" cy="685800"/>
+            <a:ext cx="11175480" cy="685440"/>
           </a:xfrm>
           <a:prstGeom prst="rect">
             <a:avLst/>
           </a:prstGeom>
+          <a:noFill/>
+          <a:ln w="0">
+            <a:noFill/>
+          </a:ln>
         </p:spPr>
+        <p:style>
+          <a:lnRef idx="0"/>
+          <a:fillRef idx="0"/>
+          <a:effectRef idx="0"/>
+          <a:fontRef idx="minor"/>
+        </p:style>
         <p:txBody>
-          <a:bodyPr/>
-          <a:lstStyle/>
-          <a:p>
-            <a:r>
-              <a:t>Thank You</a:t>
-            </a:r>
+          <a:bodyPr lIns="90000" rIns="90000" tIns="45000" bIns="45000" anchor="t">
+            <a:noAutofit/>
+          </a:bodyPr>
+          <a:p>
+            <a:pPr>
+              <a:lnSpc>
+                <a:spcPct val="100000"/>
+              </a:lnSpc>
+            </a:pPr>
+            <a:r>
+              <a:rPr lang="en-GB" sz="1800" b="0" u="none" strike="noStrike">
+                <a:solidFill>
+                  <a:srgbClr val="000000"/>
+                </a:solidFill>
+                <a:effectLst/>
+                <a:uFillTx/>
+                <a:latin typeface="Arial"/>
+              </a:rPr>
+              <a:t>Demo Flow</a:t>
+            </a:r>
+            <a:endParaRPr lang="en-GB" sz="1800" b="0" u="none" strike="noStrike">
+              <a:solidFill>
+                <a:srgbClr val="000000"/>
+              </a:solidFill>
+              <a:effectLst/>
+              <a:uFillTx/>
+              <a:latin typeface="Arial"/>
+            </a:endParaRPr>
           </a:p>
         </p:txBody>
       </p:sp>
       <p:sp>
         <p:nvSpPr>
-          <p:cNvPr id="3" name="Body"/>
+          <p:cNvPr id="41" name="Body"/>
           <p:cNvSpPr/>
           <p:nvPr/>
         </p:nvSpPr>
         <p:spPr>
           <a:xfrm>
             <a:off x="685800" y="1371600"/>
-            <a:ext cx="10800000" cy="4572000"/>
+            <a:ext cx="10799640" cy="4571640"/>
           </a:xfrm>
           <a:prstGeom prst="rect">
             <a:avLst/>
           </a:prstGeom>
+          <a:noFill/>
+          <a:ln w="0">
+            <a:noFill/>
+          </a:ln>
         </p:spPr>
+        <p:style>
+          <a:lnRef idx="0"/>
+          <a:fillRef idx="0"/>
+          <a:effectRef idx="0"/>
+          <a:fontRef idx="minor"/>
+        </p:style>
         <p:txBody>
-          <a:bodyPr wrap="square"/>
-          <a:lstStyle/>
-          <a:p>
-            <a:r>
-              <a:t>- Questions?</a:t>
-            </a:r>
+          <a:bodyPr lIns="90000" rIns="90000" tIns="45000" bIns="45000" anchor="t">
+            <a:noAutofit/>
+          </a:bodyPr>
+          <a:p>
+            <a:pPr>
+              <a:lnSpc>
+                <a:spcPct val="100000"/>
+              </a:lnSpc>
+            </a:pPr>
+            <a:r>
+              <a:rPr lang="en-GB" sz="1800" b="0" u="none" strike="noStrike">
+                <a:solidFill>
+                  <a:srgbClr val="000000"/>
+                </a:solidFill>
+                <a:effectLst/>
+                <a:uFillTx/>
+                <a:latin typeface="Arial"/>
+              </a:rPr>
+              <a:t>- Signup/login</a:t>
+            </a:r>
+            <a:endParaRPr lang="en-GB" sz="1800" b="0" u="none" strike="noStrike">
+              <a:solidFill>
+                <a:srgbClr val="000000"/>
+              </a:solidFill>
+              <a:effectLst/>
+              <a:uFillTx/>
+              <a:latin typeface="Arial"/>
+            </a:endParaRPr>
+          </a:p>
+          <a:p>
+            <a:pPr>
+              <a:lnSpc>
+                <a:spcPct val="100000"/>
+              </a:lnSpc>
+            </a:pPr>
+            <a:r>
+              <a:rPr lang="en-GB" sz="1800" b="0" u="none" strike="noStrike">
+                <a:solidFill>
+                  <a:srgbClr val="000000"/>
+                </a:solidFill>
+                <a:effectLst/>
+                <a:uFillTx/>
+                <a:latin typeface="Arial"/>
+              </a:rPr>
+              <a:t>- Create server and channel</a:t>
+            </a:r>
+            <a:endParaRPr lang="en-GB" sz="1800" b="0" u="none" strike="noStrike">
+              <a:solidFill>
+                <a:srgbClr val="000000"/>
+              </a:solidFill>
+              <a:effectLst/>
+              <a:uFillTx/>
+              <a:latin typeface="Arial"/>
+            </a:endParaRPr>
+          </a:p>
+          <a:p>
+            <a:pPr>
+              <a:lnSpc>
+                <a:spcPct val="100000"/>
+              </a:lnSpc>
+            </a:pPr>
+            <a:r>
+              <a:rPr lang="en-GB" sz="1800" b="0" u="none" strike="noStrike">
+                <a:solidFill>
+                  <a:srgbClr val="000000"/>
+                </a:solidFill>
+                <a:effectLst/>
+                <a:uFillTx/>
+                <a:latin typeface="Arial"/>
+              </a:rPr>
+              <a:t>- Invite friend and chat</a:t>
+            </a:r>
+            <a:endParaRPr lang="en-GB" sz="1800" b="0" u="none" strike="noStrike">
+              <a:solidFill>
+                <a:srgbClr val="000000"/>
+              </a:solidFill>
+              <a:effectLst/>
+              <a:uFillTx/>
+              <a:latin typeface="Arial"/>
+            </a:endParaRPr>
+          </a:p>
+          <a:p>
+            <a:pPr>
+              <a:lnSpc>
+                <a:spcPct val="100000"/>
+              </a:lnSpc>
+            </a:pPr>
+            <a:r>
+              <a:rPr lang="en-GB" sz="1800" b="0" u="none" strike="noStrike">
+                <a:solidFill>
+                  <a:srgbClr val="000000"/>
+                </a:solidFill>
+                <a:effectLst/>
+                <a:uFillTx/>
+                <a:latin typeface="Arial"/>
+              </a:rPr>
+              <a:t>- Direct message and edit/delete</a:t>
+            </a:r>
+            <a:endParaRPr lang="en-GB" sz="1800" b="0" u="none" strike="noStrike">
+              <a:solidFill>
+                <a:srgbClr val="000000"/>
+              </a:solidFill>
+              <a:effectLst/>
+              <a:uFillTx/>
+              <a:latin typeface="Arial"/>
+            </a:endParaRPr>
           </a:p>
         </p:txBody>
       </p:sp>
     </p:spTree>
   </p:cSld>
-  <p:clrMapOvr>
-    <a:masterClrMapping/>
-  </p:clrMapOvr>
+  <mc:AlternateContent>
+    <mc:Choice Requires="p14">
+      <p:transition spd="slow" p14:dur="2000"/>
+    </mc:Choice>
+    <mc:Fallback>
+      <p:transition spd="slow"/>
+    </mc:Fallback>
+  </mc:AlternateContent>
 </p:sld>
 </file>
 
-<file path=ppt/slides/slide2.xml><?xml version="1.0" encoding="utf-8"?>
-<p:sld xmlns:a="http://schemas.openxmlformats.org/drawingml/2006/main" xmlns:r="http://schemas.openxmlformats.org/officeDocument/2006/relationships" xmlns:p="http://schemas.openxmlformats.org/presentationml/2006/main">
+<file path=ppt/slides/slide18.xml><?xml version="1.0" encoding="utf-8"?>
+<p:sld xmlns:a="http://schemas.openxmlformats.org/drawingml/2006/main" xmlns:p="http://schemas.openxmlformats.org/presentationml/2006/main" xmlns:r="http://schemas.openxmlformats.org/officeDocument/2006/relationships" xmlns:p14="http://schemas.microsoft.com/office/powerpoint/2010/main" xmlns:p15="http://schemas.microsoft.com/office/powerpoint/2012/main" xmlns:mc="http://schemas.openxmlformats.org/markup-compatibility/2006">
   <p:cSld>
     <p:spTree>
       <p:nvGrpSpPr>
@@ -990,89 +2543,185 @@
       </p:grpSpPr>
       <p:sp>
         <p:nvSpPr>
-          <p:cNvPr id="2" name="Title"/>
+          <p:cNvPr id="42" name="Title"/>
           <p:cNvSpPr/>
           <p:nvPr/>
         </p:nvSpPr>
         <p:spPr>
           <a:xfrm>
             <a:off x="457200" y="228600"/>
-            <a:ext cx="11176000" cy="685800"/>
+            <a:ext cx="11175480" cy="685440"/>
           </a:xfrm>
           <a:prstGeom prst="rect">
             <a:avLst/>
           </a:prstGeom>
+          <a:noFill/>
+          <a:ln w="0">
+            <a:noFill/>
+          </a:ln>
         </p:spPr>
+        <p:style>
+          <a:lnRef idx="0"/>
+          <a:fillRef idx="0"/>
+          <a:effectRef idx="0"/>
+          <a:fontRef idx="minor"/>
+        </p:style>
         <p:txBody>
-          <a:bodyPr/>
-          <a:lstStyle/>
-          <a:p>
-            <a:r>
-              <a:t>Agenda</a:t>
-            </a:r>
+          <a:bodyPr lIns="90000" rIns="90000" tIns="45000" bIns="45000" anchor="t">
+            <a:noAutofit/>
+          </a:bodyPr>
+          <a:p>
+            <a:pPr>
+              <a:lnSpc>
+                <a:spcPct val="100000"/>
+              </a:lnSpc>
+            </a:pPr>
+            <a:r>
+              <a:rPr lang="en-GB" sz="1800" b="0" u="none" strike="noStrike">
+                <a:solidFill>
+                  <a:srgbClr val="000000"/>
+                </a:solidFill>
+                <a:effectLst/>
+                <a:uFillTx/>
+                <a:latin typeface="Arial"/>
+              </a:rPr>
+              <a:t>Roadmap</a:t>
+            </a:r>
+            <a:endParaRPr lang="en-GB" sz="1800" b="0" u="none" strike="noStrike">
+              <a:solidFill>
+                <a:srgbClr val="000000"/>
+              </a:solidFill>
+              <a:effectLst/>
+              <a:uFillTx/>
+              <a:latin typeface="Arial"/>
+            </a:endParaRPr>
           </a:p>
         </p:txBody>
       </p:sp>
       <p:sp>
         <p:nvSpPr>
-          <p:cNvPr id="3" name="Body"/>
+          <p:cNvPr id="43" name="Body"/>
           <p:cNvSpPr/>
           <p:nvPr/>
         </p:nvSpPr>
         <p:spPr>
           <a:xfrm>
             <a:off x="685800" y="1371600"/>
-            <a:ext cx="10800000" cy="4572000"/>
+            <a:ext cx="10799640" cy="4571640"/>
           </a:xfrm>
           <a:prstGeom prst="rect">
             <a:avLst/>
           </a:prstGeom>
+          <a:noFill/>
+          <a:ln w="0">
+            <a:noFill/>
+          </a:ln>
         </p:spPr>
+        <p:style>
+          <a:lnRef idx="0"/>
+          <a:fillRef idx="0"/>
+          <a:effectRef idx="0"/>
+          <a:fontRef idx="minor"/>
+        </p:style>
         <p:txBody>
-          <a:bodyPr wrap="square"/>
-          <a:lstStyle/>
-          <a:p>
-            <a:r>
-              <a:t>- Project goals</a:t>
-            </a:r>
-          </a:p>
-          <a:p>
-            <a:r>
-              <a:t>- Architecture overview</a:t>
-            </a:r>
-          </a:p>
-          <a:p>
-            <a:r>
-              <a:t>- Core features</a:t>
-            </a:r>
-          </a:p>
-          <a:p>
-            <a:r>
-              <a:t>- Realtime flows</a:t>
-            </a:r>
-          </a:p>
-          <a:p>
-            <a:r>
-              <a:t>- Testing and docs</a:t>
-            </a:r>
-          </a:p>
-          <a:p>
-            <a:r>
-              <a:t>- Deployment</a:t>
-            </a:r>
+          <a:bodyPr lIns="90000" rIns="90000" tIns="45000" bIns="45000" anchor="t">
+            <a:noAutofit/>
+          </a:bodyPr>
+          <a:p>
+            <a:pPr>
+              <a:lnSpc>
+                <a:spcPct val="100000"/>
+              </a:lnSpc>
+            </a:pPr>
+            <a:r>
+              <a:rPr lang="en-GB" sz="1800" b="0" u="none" strike="noStrike">
+                <a:solidFill>
+                  <a:srgbClr val="000000"/>
+                </a:solidFill>
+                <a:effectLst/>
+                <a:uFillTx/>
+                <a:latin typeface="Arial"/>
+              </a:rPr>
+              <a:t>- Role management UI</a:t>
+            </a:r>
+            <a:endParaRPr lang="en-GB" sz="1800" b="0" u="none" strike="noStrike">
+              <a:solidFill>
+                <a:srgbClr val="000000"/>
+              </a:solidFill>
+              <a:effectLst/>
+              <a:uFillTx/>
+              <a:latin typeface="Arial"/>
+            </a:endParaRPr>
+          </a:p>
+          <a:p>
+            <a:pPr>
+              <a:lnSpc>
+                <a:spcPct val="100000"/>
+              </a:lnSpc>
+            </a:pPr>
+            <a:r>
+              <a:rPr lang="en-GB" sz="1800" b="0" u="none" strike="noStrike">
+                <a:solidFill>
+                  <a:srgbClr val="000000"/>
+                </a:solidFill>
+                <a:effectLst/>
+                <a:uFillTx/>
+                <a:latin typeface="Arial"/>
+              </a:rPr>
+              <a:t>- File sharing + reactions UI</a:t>
+            </a:r>
+            <a:endParaRPr lang="en-GB" sz="1800" b="0" u="none" strike="noStrike">
+              <a:solidFill>
+                <a:srgbClr val="000000"/>
+              </a:solidFill>
+              <a:effectLst/>
+              <a:uFillTx/>
+              <a:latin typeface="Arial"/>
+            </a:endParaRPr>
+          </a:p>
+          <a:p>
+            <a:pPr>
+              <a:lnSpc>
+                <a:spcPct val="100000"/>
+              </a:lnSpc>
+            </a:pPr>
+            <a:r>
+              <a:rPr lang="en-GB" sz="1800" b="0" u="none" strike="noStrike">
+                <a:solidFill>
+                  <a:srgbClr val="000000"/>
+                </a:solidFill>
+                <a:effectLst/>
+                <a:uFillTx/>
+                <a:latin typeface="Arial"/>
+              </a:rPr>
+              <a:t>- Search and message history paging</a:t>
+            </a:r>
+            <a:endParaRPr lang="en-GB" sz="1800" b="0" u="none" strike="noStrike">
+              <a:solidFill>
+                <a:srgbClr val="000000"/>
+              </a:solidFill>
+              <a:effectLst/>
+              <a:uFillTx/>
+              <a:latin typeface="Arial"/>
+            </a:endParaRPr>
           </a:p>
         </p:txBody>
       </p:sp>
     </p:spTree>
   </p:cSld>
-  <p:clrMapOvr>
-    <a:masterClrMapping/>
-  </p:clrMapOvr>
+  <mc:AlternateContent>
+    <mc:Choice Requires="p14">
+      <p:transition spd="slow" p14:dur="2000"/>
+    </mc:Choice>
+    <mc:Fallback>
+      <p:transition spd="slow"/>
+    </mc:Fallback>
+  </mc:AlternateContent>
 </p:sld>
 </file>
 
-<file path=ppt/slides/slide3.xml><?xml version="1.0" encoding="utf-8"?>
-<p:sld xmlns:a="http://schemas.openxmlformats.org/drawingml/2006/main" xmlns:r="http://schemas.openxmlformats.org/officeDocument/2006/relationships" xmlns:p="http://schemas.openxmlformats.org/presentationml/2006/main">
+<file path=ppt/slides/slide19.xml><?xml version="1.0" encoding="utf-8"?>
+<p:sld xmlns:a="http://schemas.openxmlformats.org/drawingml/2006/main" xmlns:p="http://schemas.openxmlformats.org/presentationml/2006/main" xmlns:r="http://schemas.openxmlformats.org/officeDocument/2006/relationships" xmlns:p14="http://schemas.microsoft.com/office/powerpoint/2010/main" xmlns:p15="http://schemas.microsoft.com/office/powerpoint/2012/main" xmlns:mc="http://schemas.openxmlformats.org/markup-compatibility/2006">
   <p:cSld>
     <p:spTree>
       <p:nvGrpSpPr>
@@ -1090,84 +2739,133 @@
       </p:grpSpPr>
       <p:sp>
         <p:nvSpPr>
-          <p:cNvPr id="2" name="Title"/>
+          <p:cNvPr id="44" name="Title"/>
           <p:cNvSpPr/>
           <p:nvPr/>
         </p:nvSpPr>
         <p:spPr>
           <a:xfrm>
             <a:off x="457200" y="228600"/>
-            <a:ext cx="11176000" cy="685800"/>
+            <a:ext cx="11175480" cy="685440"/>
           </a:xfrm>
           <a:prstGeom prst="rect">
             <a:avLst/>
           </a:prstGeom>
+          <a:noFill/>
+          <a:ln w="0">
+            <a:noFill/>
+          </a:ln>
         </p:spPr>
+        <p:style>
+          <a:lnRef idx="0"/>
+          <a:fillRef idx="0"/>
+          <a:effectRef idx="0"/>
+          <a:fontRef idx="minor"/>
+        </p:style>
         <p:txBody>
-          <a:bodyPr/>
-          <a:lstStyle/>
-          <a:p>
-            <a:r>
-              <a:t>Architecture Overview</a:t>
-            </a:r>
+          <a:bodyPr lIns="90000" rIns="90000" tIns="45000" bIns="45000" anchor="t">
+            <a:noAutofit/>
+          </a:bodyPr>
+          <a:p>
+            <a:pPr>
+              <a:lnSpc>
+                <a:spcPct val="100000"/>
+              </a:lnSpc>
+            </a:pPr>
+            <a:r>
+              <a:rPr lang="en-GB" sz="1800" b="0" u="none" strike="noStrike">
+                <a:solidFill>
+                  <a:srgbClr val="000000"/>
+                </a:solidFill>
+                <a:effectLst/>
+                <a:uFillTx/>
+                <a:latin typeface="Arial"/>
+              </a:rPr>
+              <a:t>Thank You</a:t>
+            </a:r>
+            <a:endParaRPr lang="en-GB" sz="1800" b="0" u="none" strike="noStrike">
+              <a:solidFill>
+                <a:srgbClr val="000000"/>
+              </a:solidFill>
+              <a:effectLst/>
+              <a:uFillTx/>
+              <a:latin typeface="Arial"/>
+            </a:endParaRPr>
           </a:p>
         </p:txBody>
       </p:sp>
       <p:sp>
         <p:nvSpPr>
-          <p:cNvPr id="3" name="Body"/>
+          <p:cNvPr id="45" name="Body"/>
           <p:cNvSpPr/>
           <p:nvPr/>
         </p:nvSpPr>
         <p:spPr>
           <a:xfrm>
             <a:off x="685800" y="1371600"/>
-            <a:ext cx="10800000" cy="4572000"/>
+            <a:ext cx="10799640" cy="4571640"/>
           </a:xfrm>
           <a:prstGeom prst="rect">
             <a:avLst/>
           </a:prstGeom>
+          <a:noFill/>
+          <a:ln w="0">
+            <a:noFill/>
+          </a:ln>
         </p:spPr>
+        <p:style>
+          <a:lnRef idx="0"/>
+          <a:fillRef idx="0"/>
+          <a:effectRef idx="0"/>
+          <a:fontRef idx="minor"/>
+        </p:style>
         <p:txBody>
-          <a:bodyPr wrap="square"/>
-          <a:lstStyle/>
-          <a:p>
-            <a:r>
-              <a:t>- Next.js UI on port 3000</a:t>
-            </a:r>
-          </a:p>
-          <a:p>
-            <a:r>
-              <a:t>- Rust API on port 3001</a:t>
-            </a:r>
-          </a:p>
-          <a:p>
-            <a:r>
-              <a:t>- WebSocket for realtime events</a:t>
-            </a:r>
-          </a:p>
-          <a:p>
-            <a:r>
-              <a:t>- PostgreSQL for persistence</a:t>
-            </a:r>
-          </a:p>
-          <a:p>
-            <a:r>
-              <a:t>- JWT auth with HttpOnly cookies</a:t>
-            </a:r>
+          <a:bodyPr lIns="90000" rIns="90000" tIns="45000" bIns="45000" anchor="t">
+            <a:noAutofit/>
+          </a:bodyPr>
+          <a:p>
+            <a:pPr>
+              <a:lnSpc>
+                <a:spcPct val="100000"/>
+              </a:lnSpc>
+            </a:pPr>
+            <a:r>
+              <a:rPr lang="en-GB" sz="1800" b="0" u="none" strike="noStrike">
+                <a:solidFill>
+                  <a:srgbClr val="000000"/>
+                </a:solidFill>
+                <a:effectLst/>
+                <a:uFillTx/>
+                <a:latin typeface="Arial"/>
+              </a:rPr>
+              <a:t>- Questions?</a:t>
+            </a:r>
+            <a:endParaRPr lang="en-GB" sz="1800" b="0" u="none" strike="noStrike">
+              <a:solidFill>
+                <a:srgbClr val="000000"/>
+              </a:solidFill>
+              <a:effectLst/>
+              <a:uFillTx/>
+              <a:latin typeface="Arial"/>
+            </a:endParaRPr>
           </a:p>
         </p:txBody>
       </p:sp>
     </p:spTree>
   </p:cSld>
-  <p:clrMapOvr>
-    <a:masterClrMapping/>
-  </p:clrMapOvr>
+  <mc:AlternateContent>
+    <mc:Choice Requires="p14">
+      <p:transition spd="slow" p14:dur="2000"/>
+    </mc:Choice>
+    <mc:Fallback>
+      <p:transition spd="slow"/>
+    </mc:Fallback>
+  </mc:AlternateContent>
 </p:sld>
 </file>
 
-<file path=ppt/slides/slide4.xml><?xml version="1.0" encoding="utf-8"?>
-<p:sld xmlns:a="http://schemas.openxmlformats.org/drawingml/2006/main" xmlns:r="http://schemas.openxmlformats.org/officeDocument/2006/relationships" xmlns:p="http://schemas.openxmlformats.org/presentationml/2006/main">
+<file path=ppt/slides/slide2.xml><?xml version="1.0" encoding="utf-8"?>
+<p:sld xmlns:a="http://schemas.openxmlformats.org/drawingml/2006/main" xmlns:p="http://schemas.openxmlformats.org/presentationml/2006/main" xmlns:r="http://schemas.openxmlformats.org/officeDocument/2006/relationships" xmlns:p14="http://schemas.microsoft.com/office/powerpoint/2010/main" xmlns:p15="http://schemas.microsoft.com/office/powerpoint/2012/main" xmlns:mc="http://schemas.openxmlformats.org/markup-compatibility/2006">
   <p:cSld>
     <p:spTree>
       <p:nvGrpSpPr>
@@ -1185,84 +2883,211 @@
       </p:grpSpPr>
       <p:sp>
         <p:nvSpPr>
-          <p:cNvPr id="2" name="Title"/>
+          <p:cNvPr id="10" name="Title"/>
           <p:cNvSpPr/>
           <p:nvPr/>
         </p:nvSpPr>
         <p:spPr>
           <a:xfrm>
             <a:off x="457200" y="228600"/>
-            <a:ext cx="11176000" cy="685800"/>
+            <a:ext cx="11175480" cy="685440"/>
           </a:xfrm>
           <a:prstGeom prst="rect">
             <a:avLst/>
           </a:prstGeom>
+          <a:noFill/>
+          <a:ln w="0">
+            <a:noFill/>
+          </a:ln>
         </p:spPr>
+        <p:style>
+          <a:lnRef idx="0"/>
+          <a:fillRef idx="0"/>
+          <a:effectRef idx="0"/>
+          <a:fontRef idx="minor"/>
+        </p:style>
         <p:txBody>
-          <a:bodyPr/>
-          <a:lstStyle/>
-          <a:p>
-            <a:r>
-              <a:t>Frontend (Next.js)</a:t>
-            </a:r>
+          <a:bodyPr lIns="90000" rIns="90000" tIns="45000" bIns="45000" anchor="t">
+            <a:noAutofit/>
+          </a:bodyPr>
+          <a:p>
+            <a:pPr>
+              <a:lnSpc>
+                <a:spcPct val="100000"/>
+              </a:lnSpc>
+            </a:pPr>
+            <a:r>
+              <a:rPr lang="en-GB" sz="1800" b="0" u="none" strike="noStrike">
+                <a:solidFill>
+                  <a:srgbClr val="000000"/>
+                </a:solidFill>
+                <a:effectLst/>
+                <a:uFillTx/>
+                <a:latin typeface="Arial"/>
+              </a:rPr>
+              <a:t>RTC Chat Project</a:t>
+            </a:r>
+            <a:endParaRPr lang="en-GB" sz="1800" b="0" u="none" strike="noStrike">
+              <a:solidFill>
+                <a:srgbClr val="000000"/>
+              </a:solidFill>
+              <a:effectLst/>
+              <a:uFillTx/>
+              <a:latin typeface="Arial"/>
+            </a:endParaRPr>
           </a:p>
         </p:txBody>
       </p:sp>
       <p:sp>
         <p:nvSpPr>
-          <p:cNvPr id="3" name="Body"/>
+          <p:cNvPr id="11" name="Body"/>
           <p:cNvSpPr/>
           <p:nvPr/>
         </p:nvSpPr>
         <p:spPr>
           <a:xfrm>
             <a:off x="685800" y="1371600"/>
-            <a:ext cx="10800000" cy="4572000"/>
+            <a:ext cx="10799640" cy="4571640"/>
           </a:xfrm>
           <a:prstGeom prst="rect">
             <a:avLst/>
           </a:prstGeom>
+          <a:noFill/>
+          <a:ln w="0">
+            <a:noFill/>
+          </a:ln>
         </p:spPr>
+        <p:style>
+          <a:lnRef idx="0"/>
+          <a:fillRef idx="0"/>
+          <a:effectRef idx="0"/>
+          <a:fontRef idx="minor"/>
+        </p:style>
         <p:txBody>
-          <a:bodyPr wrap="square"/>
-          <a:lstStyle/>
-          <a:p>
-            <a:r>
-              <a:t>- App router pages: login, register, home, servers, dm</a:t>
-            </a:r>
-          </a:p>
-          <a:p>
-            <a:r>
-              <a:t>- UI components under components/</a:t>
-            </a:r>
-          </a:p>
-          <a:p>
-            <a:r>
-              <a:t>- API routes proxy backend</a:t>
-            </a:r>
-          </a:p>
-          <a:p>
-            <a:r>
-              <a:t>- WebSocket client for live updates</a:t>
-            </a:r>
-          </a:p>
-          <a:p>
-            <a:r>
-              <a:t>- Tailwind + custom CSS</a:t>
-            </a:r>
+          <a:bodyPr lIns="90000" rIns="90000" tIns="45000" bIns="45000" anchor="t">
+            <a:noAutofit/>
+          </a:bodyPr>
+          <a:p>
+            <a:pPr>
+              <a:lnSpc>
+                <a:spcPct val="100000"/>
+              </a:lnSpc>
+            </a:pPr>
+            <a:r>
+              <a:rPr lang="en-GB" sz="1800" b="0" u="none" strike="noStrike">
+                <a:solidFill>
+                  <a:srgbClr val="000000"/>
+                </a:solidFill>
+                <a:effectLst/>
+                <a:uFillTx/>
+                <a:latin typeface="Arial"/>
+              </a:rPr>
+              <a:t>- Discord-like real time chat app</a:t>
+            </a:r>
+            <a:endParaRPr lang="en-GB" sz="1800" b="0" u="none" strike="noStrike">
+              <a:solidFill>
+                <a:srgbClr val="000000"/>
+              </a:solidFill>
+              <a:effectLst/>
+              <a:uFillTx/>
+              <a:latin typeface="Arial"/>
+            </a:endParaRPr>
+          </a:p>
+          <a:p>
+            <a:pPr>
+              <a:lnSpc>
+                <a:spcPct val="100000"/>
+              </a:lnSpc>
+            </a:pPr>
+            <a:r>
+              <a:rPr lang="en-GB" sz="1800" b="0" u="none" strike="noStrike">
+                <a:solidFill>
+                  <a:srgbClr val="000000"/>
+                </a:solidFill>
+                <a:effectLst/>
+                <a:uFillTx/>
+                <a:latin typeface="Arial"/>
+              </a:rPr>
+              <a:t>- Frontend: Next.js (React)</a:t>
+            </a:r>
+            <a:endParaRPr lang="en-GB" sz="1800" b="0" u="none" strike="noStrike">
+              <a:solidFill>
+                <a:srgbClr val="000000"/>
+              </a:solidFill>
+              <a:effectLst/>
+              <a:uFillTx/>
+              <a:latin typeface="Arial"/>
+            </a:endParaRPr>
+          </a:p>
+          <a:p>
+            <a:pPr>
+              <a:lnSpc>
+                <a:spcPct val="100000"/>
+              </a:lnSpc>
+            </a:pPr>
+            <a:r>
+              <a:rPr lang="en-GB" sz="1800" b="0" u="none" strike="noStrike">
+                <a:solidFill>
+                  <a:srgbClr val="000000"/>
+                </a:solidFill>
+                <a:effectLst/>
+                <a:uFillTx/>
+                <a:latin typeface="Arial"/>
+              </a:rPr>
+              <a:t>- Backend: Rust + Axum</a:t>
+            </a:r>
+            <a:endParaRPr lang="en-GB" sz="1800" b="0" u="none" strike="noStrike">
+              <a:solidFill>
+                <a:srgbClr val="000000"/>
+              </a:solidFill>
+              <a:effectLst/>
+              <a:uFillTx/>
+              <a:latin typeface="Arial"/>
+            </a:endParaRPr>
+          </a:p>
+          <a:p>
+            <a:pPr>
+              <a:lnSpc>
+                <a:spcPct val="100000"/>
+              </a:lnSpc>
+            </a:pPr>
+            <a:r>
+              <a:rPr lang="en-GB" sz="1800" b="0" u="none" strike="noStrike">
+                <a:solidFill>
+                  <a:srgbClr val="000000"/>
+                </a:solidFill>
+                <a:effectLst/>
+                <a:uFillTx/>
+                <a:latin typeface="Arial"/>
+              </a:rPr>
+              <a:t>- Database: PostgreSQL (Railway)</a:t>
+            </a:r>
+            <a:endParaRPr lang="en-GB" sz="1800" b="0" u="none" strike="noStrike">
+              <a:solidFill>
+                <a:srgbClr val="000000"/>
+              </a:solidFill>
+              <a:effectLst/>
+              <a:uFillTx/>
+              <a:latin typeface="Arial"/>
+            </a:endParaRPr>
           </a:p>
         </p:txBody>
       </p:sp>
     </p:spTree>
   </p:cSld>
-  <p:clrMapOvr>
-    <a:masterClrMapping/>
-  </p:clrMapOvr>
+  <mc:AlternateContent>
+    <mc:Choice Requires="p14">
+      <p:transition spd="slow" p14:dur="2000"/>
+    </mc:Choice>
+    <mc:Fallback>
+      <p:transition spd="slow"/>
+    </mc:Fallback>
+  </mc:AlternateContent>
 </p:sld>
 </file>
 
-<file path=ppt/slides/slide5.xml><?xml version="1.0" encoding="utf-8"?>
-<p:sld xmlns:a="http://schemas.openxmlformats.org/drawingml/2006/main" xmlns:r="http://schemas.openxmlformats.org/officeDocument/2006/relationships" xmlns:p="http://schemas.openxmlformats.org/presentationml/2006/main">
+<file path=ppt/slides/slide3.xml><?xml version="1.0" encoding="utf-8"?>
+<p:sld xmlns:a="http://schemas.openxmlformats.org/drawingml/2006/main" xmlns:p="http://schemas.openxmlformats.org/presentationml/2006/main" xmlns:r="http://schemas.openxmlformats.org/officeDocument/2006/relationships" xmlns:p14="http://schemas.microsoft.com/office/powerpoint/2010/main" xmlns:p15="http://schemas.microsoft.com/office/powerpoint/2012/main" xmlns:mc="http://schemas.openxmlformats.org/markup-compatibility/2006">
   <p:cSld>
     <p:spTree>
       <p:nvGrpSpPr>
@@ -1280,84 +3105,263 @@
       </p:grpSpPr>
       <p:sp>
         <p:nvSpPr>
-          <p:cNvPr id="2" name="Title"/>
+          <p:cNvPr id="12" name="Title"/>
           <p:cNvSpPr/>
           <p:nvPr/>
         </p:nvSpPr>
         <p:spPr>
           <a:xfrm>
             <a:off x="457200" y="228600"/>
-            <a:ext cx="11176000" cy="685800"/>
+            <a:ext cx="11175480" cy="685440"/>
           </a:xfrm>
           <a:prstGeom prst="rect">
             <a:avLst/>
           </a:prstGeom>
+          <a:noFill/>
+          <a:ln w="0">
+            <a:noFill/>
+          </a:ln>
         </p:spPr>
+        <p:style>
+          <a:lnRef idx="0"/>
+          <a:fillRef idx="0"/>
+          <a:effectRef idx="0"/>
+          <a:fontRef idx="minor"/>
+        </p:style>
         <p:txBody>
-          <a:bodyPr/>
-          <a:lstStyle/>
-          <a:p>
-            <a:r>
-              <a:t>Backend (Rust + Axum)</a:t>
-            </a:r>
+          <a:bodyPr lIns="90000" rIns="90000" tIns="45000" bIns="45000" anchor="t">
+            <a:noAutofit/>
+          </a:bodyPr>
+          <a:p>
+            <a:pPr>
+              <a:lnSpc>
+                <a:spcPct val="100000"/>
+              </a:lnSpc>
+            </a:pPr>
+            <a:r>
+              <a:rPr lang="en-GB" sz="1800" b="0" u="none" strike="noStrike">
+                <a:solidFill>
+                  <a:srgbClr val="000000"/>
+                </a:solidFill>
+                <a:effectLst/>
+                <a:uFillTx/>
+                <a:latin typeface="Arial"/>
+              </a:rPr>
+              <a:t>Agenda</a:t>
+            </a:r>
+            <a:endParaRPr lang="en-GB" sz="1800" b="0" u="none" strike="noStrike">
+              <a:solidFill>
+                <a:srgbClr val="000000"/>
+              </a:solidFill>
+              <a:effectLst/>
+              <a:uFillTx/>
+              <a:latin typeface="Arial"/>
+            </a:endParaRPr>
           </a:p>
         </p:txBody>
       </p:sp>
       <p:sp>
         <p:nvSpPr>
-          <p:cNvPr id="3" name="Body"/>
+          <p:cNvPr id="13" name="Body"/>
           <p:cNvSpPr/>
           <p:nvPr/>
         </p:nvSpPr>
         <p:spPr>
           <a:xfrm>
             <a:off x="685800" y="1371600"/>
-            <a:ext cx="10800000" cy="4572000"/>
+            <a:ext cx="10799640" cy="4571640"/>
           </a:xfrm>
           <a:prstGeom prst="rect">
             <a:avLst/>
           </a:prstGeom>
+          <a:noFill/>
+          <a:ln w="0">
+            <a:noFill/>
+          </a:ln>
         </p:spPr>
+        <p:style>
+          <a:lnRef idx="0"/>
+          <a:fillRef idx="0"/>
+          <a:effectRef idx="0"/>
+          <a:fontRef idx="minor"/>
+        </p:style>
         <p:txBody>
-          <a:bodyPr wrap="square"/>
-          <a:lstStyle/>
-          <a:p>
-            <a:r>
-              <a:t>- REST + WebSocket in one server</a:t>
-            </a:r>
-          </a:p>
-          <a:p>
-            <a:r>
-              <a:t>- SQLx with migrations</a:t>
-            </a:r>
-          </a:p>
-          <a:p>
-            <a:r>
-              <a:t>- JWT auth and token revocation</a:t>
-            </a:r>
-          </a:p>
-          <a:p>
-            <a:r>
-              <a:t>- Role-based permissions (owner/admin/member)</a:t>
-            </a:r>
-          </a:p>
-          <a:p>
-            <a:r>
-              <a:t>- Presence and typing state in memory</a:t>
-            </a:r>
+          <a:bodyPr lIns="90000" rIns="90000" tIns="45000" bIns="45000" anchor="t">
+            <a:noAutofit/>
+          </a:bodyPr>
+          <a:p>
+            <a:pPr>
+              <a:lnSpc>
+                <a:spcPct val="100000"/>
+              </a:lnSpc>
+            </a:pPr>
+            <a:r>
+              <a:rPr lang="en-GB" sz="1800" b="0" u="none" strike="noStrike">
+                <a:solidFill>
+                  <a:srgbClr val="000000"/>
+                </a:solidFill>
+                <a:effectLst/>
+                <a:uFillTx/>
+                <a:latin typeface="Arial"/>
+              </a:rPr>
+              <a:t>- Project goals</a:t>
+            </a:r>
+            <a:endParaRPr lang="en-GB" sz="1800" b="0" u="none" strike="noStrike">
+              <a:solidFill>
+                <a:srgbClr val="000000"/>
+              </a:solidFill>
+              <a:effectLst/>
+              <a:uFillTx/>
+              <a:latin typeface="Arial"/>
+            </a:endParaRPr>
+          </a:p>
+          <a:p>
+            <a:pPr>
+              <a:lnSpc>
+                <a:spcPct val="100000"/>
+              </a:lnSpc>
+            </a:pPr>
+            <a:r>
+              <a:rPr lang="en-GB" sz="1800" b="0" u="none" strike="noStrike">
+                <a:solidFill>
+                  <a:srgbClr val="000000"/>
+                </a:solidFill>
+                <a:effectLst/>
+                <a:uFillTx/>
+                <a:latin typeface="Arial"/>
+              </a:rPr>
+              <a:t>- Architecture overview</a:t>
+            </a:r>
+            <a:endParaRPr lang="en-GB" sz="1800" b="0" u="none" strike="noStrike">
+              <a:solidFill>
+                <a:srgbClr val="000000"/>
+              </a:solidFill>
+              <a:effectLst/>
+              <a:uFillTx/>
+              <a:latin typeface="Arial"/>
+            </a:endParaRPr>
+          </a:p>
+          <a:p>
+            <a:pPr>
+              <a:lnSpc>
+                <a:spcPct val="100000"/>
+              </a:lnSpc>
+            </a:pPr>
+            <a:r>
+              <a:rPr lang="en-GB" sz="1800" b="0" u="none" strike="noStrike">
+                <a:solidFill>
+                  <a:srgbClr val="000000"/>
+                </a:solidFill>
+                <a:effectLst/>
+                <a:uFillTx/>
+                <a:latin typeface="Arial"/>
+              </a:rPr>
+              <a:t>- Core features</a:t>
+            </a:r>
+            <a:endParaRPr lang="en-GB" sz="1800" b="0" u="none" strike="noStrike">
+              <a:solidFill>
+                <a:srgbClr val="000000"/>
+              </a:solidFill>
+              <a:effectLst/>
+              <a:uFillTx/>
+              <a:latin typeface="Arial"/>
+            </a:endParaRPr>
+          </a:p>
+          <a:p>
+            <a:pPr>
+              <a:lnSpc>
+                <a:spcPct val="100000"/>
+              </a:lnSpc>
+            </a:pPr>
+            <a:r>
+              <a:rPr lang="en-GB" sz="1800" b="0" u="none" strike="noStrike">
+                <a:solidFill>
+                  <a:srgbClr val="000000"/>
+                </a:solidFill>
+                <a:effectLst/>
+                <a:uFillTx/>
+                <a:latin typeface="Arial"/>
+              </a:rPr>
+              <a:t>- Realtime flows</a:t>
+            </a:r>
+            <a:endParaRPr lang="en-GB" sz="1800" b="0" u="none" strike="noStrike">
+              <a:solidFill>
+                <a:srgbClr val="000000"/>
+              </a:solidFill>
+              <a:effectLst/>
+              <a:uFillTx/>
+              <a:latin typeface="Arial"/>
+            </a:endParaRPr>
+          </a:p>
+          <a:p>
+            <a:pPr>
+              <a:lnSpc>
+                <a:spcPct val="100000"/>
+              </a:lnSpc>
+            </a:pPr>
+            <a:r>
+              <a:rPr lang="en-GB" sz="1800" b="0" u="none" strike="noStrike">
+                <a:solidFill>
+                  <a:srgbClr val="000000"/>
+                </a:solidFill>
+                <a:effectLst/>
+                <a:uFillTx/>
+                <a:latin typeface="Arial"/>
+              </a:rPr>
+              <a:t>- Testing and docs</a:t>
+            </a:r>
+            <a:endParaRPr lang="en-GB" sz="1800" b="0" u="none" strike="noStrike">
+              <a:solidFill>
+                <a:srgbClr val="000000"/>
+              </a:solidFill>
+              <a:effectLst/>
+              <a:uFillTx/>
+              <a:latin typeface="Arial"/>
+            </a:endParaRPr>
+          </a:p>
+          <a:p>
+            <a:pPr>
+              <a:lnSpc>
+                <a:spcPct val="100000"/>
+              </a:lnSpc>
+            </a:pPr>
+            <a:r>
+              <a:rPr lang="en-GB" sz="1800" b="0" u="none" strike="noStrike">
+                <a:solidFill>
+                  <a:srgbClr val="000000"/>
+                </a:solidFill>
+                <a:effectLst/>
+                <a:uFillTx/>
+                <a:latin typeface="Arial"/>
+              </a:rPr>
+              <a:t>- Deployment</a:t>
+            </a:r>
+            <a:endParaRPr lang="en-GB" sz="1800" b="0" u="none" strike="noStrike">
+              <a:solidFill>
+                <a:srgbClr val="000000"/>
+              </a:solidFill>
+              <a:effectLst/>
+              <a:uFillTx/>
+              <a:latin typeface="Arial"/>
+            </a:endParaRPr>
           </a:p>
         </p:txBody>
       </p:sp>
     </p:spTree>
   </p:cSld>
-  <p:clrMapOvr>
-    <a:masterClrMapping/>
-  </p:clrMapOvr>
+  <mc:AlternateContent>
+    <mc:Choice Requires="p14">
+      <p:transition spd="slow" p14:dur="2000"/>
+    </mc:Choice>
+    <mc:Fallback>
+      <p:transition spd="slow"/>
+    </mc:Fallback>
+  </mc:AlternateContent>
 </p:sld>
 </file>
 
-<file path=ppt/slides/slide6.xml><?xml version="1.0" encoding="utf-8"?>
-<p:sld xmlns:a="http://schemas.openxmlformats.org/drawingml/2006/main" xmlns:r="http://schemas.openxmlformats.org/officeDocument/2006/relationships" xmlns:p="http://schemas.openxmlformats.org/presentationml/2006/main">
+<file path=ppt/slides/slide4.xml><?xml version="1.0" encoding="utf-8"?>
+<p:sld xmlns:a="http://schemas.openxmlformats.org/drawingml/2006/main" xmlns:p="http://schemas.openxmlformats.org/presentationml/2006/main" xmlns:r="http://schemas.openxmlformats.org/officeDocument/2006/relationships" xmlns:p14="http://schemas.microsoft.com/office/powerpoint/2010/main" xmlns:p15="http://schemas.microsoft.com/office/powerpoint/2012/main" xmlns:mc="http://schemas.openxmlformats.org/markup-compatibility/2006">
   <p:cSld>
     <p:spTree>
       <p:nvGrpSpPr>
@@ -1375,79 +3379,237 @@
       </p:grpSpPr>
       <p:sp>
         <p:nvSpPr>
-          <p:cNvPr id="2" name="Title"/>
+          <p:cNvPr id="14" name="Title"/>
           <p:cNvSpPr/>
           <p:nvPr/>
         </p:nvSpPr>
         <p:spPr>
           <a:xfrm>
             <a:off x="457200" y="228600"/>
-            <a:ext cx="11176000" cy="685800"/>
+            <a:ext cx="11175480" cy="685440"/>
           </a:xfrm>
           <a:prstGeom prst="rect">
             <a:avLst/>
           </a:prstGeom>
+          <a:noFill/>
+          <a:ln w="0">
+            <a:noFill/>
+          </a:ln>
         </p:spPr>
+        <p:style>
+          <a:lnRef idx="0"/>
+          <a:fillRef idx="0"/>
+          <a:effectRef idx="0"/>
+          <a:fontRef idx="minor"/>
+        </p:style>
         <p:txBody>
-          <a:bodyPr/>
-          <a:lstStyle/>
-          <a:p>
-            <a:r>
-              <a:t>Authentication Flow</a:t>
-            </a:r>
+          <a:bodyPr lIns="90000" rIns="90000" tIns="45000" bIns="45000" anchor="t">
+            <a:noAutofit/>
+          </a:bodyPr>
+          <a:p>
+            <a:pPr>
+              <a:lnSpc>
+                <a:spcPct val="100000"/>
+              </a:lnSpc>
+            </a:pPr>
+            <a:r>
+              <a:rPr lang="en-GB" sz="1800" b="0" u="none" strike="noStrike">
+                <a:solidFill>
+                  <a:srgbClr val="000000"/>
+                </a:solidFill>
+                <a:effectLst/>
+                <a:uFillTx/>
+                <a:latin typeface="Arial"/>
+              </a:rPr>
+              <a:t>Architecture Overview</a:t>
+            </a:r>
+            <a:endParaRPr lang="en-GB" sz="1800" b="0" u="none" strike="noStrike">
+              <a:solidFill>
+                <a:srgbClr val="000000"/>
+              </a:solidFill>
+              <a:effectLst/>
+              <a:uFillTx/>
+              <a:latin typeface="Arial"/>
+            </a:endParaRPr>
           </a:p>
         </p:txBody>
       </p:sp>
       <p:sp>
         <p:nvSpPr>
-          <p:cNvPr id="3" name="Body"/>
+          <p:cNvPr id="15" name="Body"/>
           <p:cNvSpPr/>
           <p:nvPr/>
         </p:nvSpPr>
         <p:spPr>
           <a:xfrm>
             <a:off x="685800" y="1371600"/>
-            <a:ext cx="10800000" cy="4572000"/>
+            <a:ext cx="10799640" cy="4571640"/>
           </a:xfrm>
           <a:prstGeom prst="rect">
             <a:avLst/>
           </a:prstGeom>
+          <a:noFill/>
+          <a:ln w="0">
+            <a:noFill/>
+          </a:ln>
         </p:spPr>
+        <p:style>
+          <a:lnRef idx="0"/>
+          <a:fillRef idx="0"/>
+          <a:effectRef idx="0"/>
+          <a:fontRef idx="minor"/>
+        </p:style>
         <p:txBody>
-          <a:bodyPr wrap="square"/>
-          <a:lstStyle/>
-          <a:p>
-            <a:r>
-              <a:t>- Signup -&gt; hash password (argon2)</a:t>
-            </a:r>
-          </a:p>
-          <a:p>
-            <a:r>
-              <a:t>- Login -&gt; issue JWT + set auth_token cookie</a:t>
-            </a:r>
-          </a:p>
-          <a:p>
-            <a:r>
-              <a:t>- Auth middleware validates JWT</a:t>
-            </a:r>
-          </a:p>
-          <a:p>
-            <a:r>
-              <a:t>- Profile update endpoint for username/email/password</a:t>
-            </a:r>
+          <a:bodyPr lIns="90000" rIns="90000" tIns="45000" bIns="45000" anchor="t">
+            <a:noAutofit/>
+          </a:bodyPr>
+          <a:p>
+            <a:pPr>
+              <a:lnSpc>
+                <a:spcPct val="100000"/>
+              </a:lnSpc>
+            </a:pPr>
+            <a:r>
+              <a:rPr lang="en-GB" sz="1800" b="0" u="none" strike="noStrike">
+                <a:solidFill>
+                  <a:srgbClr val="000000"/>
+                </a:solidFill>
+                <a:effectLst/>
+                <a:uFillTx/>
+                <a:latin typeface="Arial"/>
+              </a:rPr>
+              <a:t>- Next.js UI on port 3000</a:t>
+            </a:r>
+            <a:endParaRPr lang="en-GB" sz="1800" b="0" u="none" strike="noStrike">
+              <a:solidFill>
+                <a:srgbClr val="000000"/>
+              </a:solidFill>
+              <a:effectLst/>
+              <a:uFillTx/>
+              <a:latin typeface="Arial"/>
+            </a:endParaRPr>
+          </a:p>
+          <a:p>
+            <a:pPr>
+              <a:lnSpc>
+                <a:spcPct val="100000"/>
+              </a:lnSpc>
+            </a:pPr>
+            <a:r>
+              <a:rPr lang="en-GB" sz="1800" b="0" u="none" strike="noStrike">
+                <a:solidFill>
+                  <a:srgbClr val="000000"/>
+                </a:solidFill>
+                <a:effectLst/>
+                <a:uFillTx/>
+                <a:latin typeface="Arial"/>
+              </a:rPr>
+              <a:t>- Rust API on port 3001</a:t>
+            </a:r>
+            <a:endParaRPr lang="en-GB" sz="1800" b="0" u="none" strike="noStrike">
+              <a:solidFill>
+                <a:srgbClr val="000000"/>
+              </a:solidFill>
+              <a:effectLst/>
+              <a:uFillTx/>
+              <a:latin typeface="Arial"/>
+            </a:endParaRPr>
+          </a:p>
+          <a:p>
+            <a:pPr>
+              <a:lnSpc>
+                <a:spcPct val="100000"/>
+              </a:lnSpc>
+            </a:pPr>
+            <a:r>
+              <a:rPr lang="en-GB" sz="1800" b="0" u="none" strike="noStrike">
+                <a:solidFill>
+                  <a:srgbClr val="000000"/>
+                </a:solidFill>
+                <a:effectLst/>
+                <a:uFillTx/>
+                <a:latin typeface="Arial"/>
+              </a:rPr>
+              <a:t>- WebSocket for realtime events</a:t>
+            </a:r>
+            <a:endParaRPr lang="en-GB" sz="1800" b="0" u="none" strike="noStrike">
+              <a:solidFill>
+                <a:srgbClr val="000000"/>
+              </a:solidFill>
+              <a:effectLst/>
+              <a:uFillTx/>
+              <a:latin typeface="Arial"/>
+            </a:endParaRPr>
+          </a:p>
+          <a:p>
+            <a:pPr>
+              <a:lnSpc>
+                <a:spcPct val="100000"/>
+              </a:lnSpc>
+            </a:pPr>
+            <a:r>
+              <a:rPr lang="en-GB" sz="1800" b="0" u="none" strike="noStrike">
+                <a:solidFill>
+                  <a:srgbClr val="000000"/>
+                </a:solidFill>
+                <a:effectLst/>
+                <a:uFillTx/>
+                <a:latin typeface="Arial"/>
+              </a:rPr>
+              <a:t>- PostgreSQL for persistence</a:t>
+            </a:r>
+            <a:endParaRPr lang="en-GB" sz="1800" b="0" u="none" strike="noStrike">
+              <a:solidFill>
+                <a:srgbClr val="000000"/>
+              </a:solidFill>
+              <a:effectLst/>
+              <a:uFillTx/>
+              <a:latin typeface="Arial"/>
+            </a:endParaRPr>
+          </a:p>
+          <a:p>
+            <a:pPr>
+              <a:lnSpc>
+                <a:spcPct val="100000"/>
+              </a:lnSpc>
+            </a:pPr>
+            <a:r>
+              <a:rPr lang="en-GB" sz="1800" b="0" u="none" strike="noStrike">
+                <a:solidFill>
+                  <a:srgbClr val="000000"/>
+                </a:solidFill>
+                <a:effectLst/>
+                <a:uFillTx/>
+                <a:latin typeface="Arial"/>
+              </a:rPr>
+              <a:t>- JWT auth with HttpOnly cookies</a:t>
+            </a:r>
+            <a:endParaRPr lang="en-GB" sz="1800" b="0" u="none" strike="noStrike">
+              <a:solidFill>
+                <a:srgbClr val="000000"/>
+              </a:solidFill>
+              <a:effectLst/>
+              <a:uFillTx/>
+              <a:latin typeface="Arial"/>
+            </a:endParaRPr>
           </a:p>
         </p:txBody>
       </p:sp>
     </p:spTree>
   </p:cSld>
-  <p:clrMapOvr>
-    <a:masterClrMapping/>
-  </p:clrMapOvr>
+  <mc:AlternateContent>
+    <mc:Choice Requires="p14">
+      <p:transition spd="slow" p14:dur="2000"/>
+    </mc:Choice>
+    <mc:Fallback>
+      <p:transition spd="slow"/>
+    </mc:Fallback>
+  </mc:AlternateContent>
 </p:sld>
 </file>
 
-<file path=ppt/slides/slide7.xml><?xml version="1.0" encoding="utf-8"?>
-<p:sld xmlns:a="http://schemas.openxmlformats.org/drawingml/2006/main" xmlns:r="http://schemas.openxmlformats.org/officeDocument/2006/relationships" xmlns:p="http://schemas.openxmlformats.org/presentationml/2006/main">
+<file path=ppt/slides/slide5.xml><?xml version="1.0" encoding="utf-8"?>
+<p:sld xmlns:a="http://schemas.openxmlformats.org/drawingml/2006/main" xmlns:p="http://schemas.openxmlformats.org/presentationml/2006/main" xmlns:r="http://schemas.openxmlformats.org/officeDocument/2006/relationships" xmlns:p14="http://schemas.microsoft.com/office/powerpoint/2010/main" xmlns:p15="http://schemas.microsoft.com/office/powerpoint/2012/main" xmlns:mc="http://schemas.openxmlformats.org/markup-compatibility/2006">
   <p:cSld>
     <p:spTree>
       <p:nvGrpSpPr>
@@ -1465,79 +3627,237 @@
       </p:grpSpPr>
       <p:sp>
         <p:nvSpPr>
-          <p:cNvPr id="2" name="Title"/>
+          <p:cNvPr id="16" name="Title"/>
           <p:cNvSpPr/>
           <p:nvPr/>
         </p:nvSpPr>
         <p:spPr>
           <a:xfrm>
             <a:off x="457200" y="228600"/>
-            <a:ext cx="11176000" cy="685800"/>
+            <a:ext cx="11175480" cy="685440"/>
           </a:xfrm>
           <a:prstGeom prst="rect">
             <a:avLst/>
           </a:prstGeom>
+          <a:noFill/>
+          <a:ln w="0">
+            <a:noFill/>
+          </a:ln>
         </p:spPr>
+        <p:style>
+          <a:lnRef idx="0"/>
+          <a:fillRef idx="0"/>
+          <a:effectRef idx="0"/>
+          <a:fontRef idx="minor"/>
+        </p:style>
         <p:txBody>
-          <a:bodyPr/>
-          <a:lstStyle/>
-          <a:p>
-            <a:r>
-              <a:t>Servers and Roles</a:t>
-            </a:r>
+          <a:bodyPr lIns="90000" rIns="90000" tIns="45000" bIns="45000" anchor="t">
+            <a:noAutofit/>
+          </a:bodyPr>
+          <a:p>
+            <a:pPr>
+              <a:lnSpc>
+                <a:spcPct val="100000"/>
+              </a:lnSpc>
+            </a:pPr>
+            <a:r>
+              <a:rPr lang="en-GB" sz="1800" b="0" u="none" strike="noStrike">
+                <a:solidFill>
+                  <a:srgbClr val="000000"/>
+                </a:solidFill>
+                <a:effectLst/>
+                <a:uFillTx/>
+                <a:latin typeface="Arial"/>
+              </a:rPr>
+              <a:t>Frontend (Next.js)</a:t>
+            </a:r>
+            <a:endParaRPr lang="en-GB" sz="1800" b="0" u="none" strike="noStrike">
+              <a:solidFill>
+                <a:srgbClr val="000000"/>
+              </a:solidFill>
+              <a:effectLst/>
+              <a:uFillTx/>
+              <a:latin typeface="Arial"/>
+            </a:endParaRPr>
           </a:p>
         </p:txBody>
       </p:sp>
       <p:sp>
         <p:nvSpPr>
-          <p:cNvPr id="3" name="Body"/>
+          <p:cNvPr id="17" name="Body"/>
           <p:cNvSpPr/>
           <p:nvPr/>
         </p:nvSpPr>
         <p:spPr>
           <a:xfrm>
             <a:off x="685800" y="1371600"/>
-            <a:ext cx="10800000" cy="4572000"/>
+            <a:ext cx="10799640" cy="4571640"/>
           </a:xfrm>
           <a:prstGeom prst="rect">
             <a:avLst/>
           </a:prstGeom>
+          <a:noFill/>
+          <a:ln w="0">
+            <a:noFill/>
+          </a:ln>
         </p:spPr>
+        <p:style>
+          <a:lnRef idx="0"/>
+          <a:fillRef idx="0"/>
+          <a:effectRef idx="0"/>
+          <a:fontRef idx="minor"/>
+        </p:style>
         <p:txBody>
-          <a:bodyPr wrap="square"/>
-          <a:lstStyle/>
-          <a:p>
-            <a:r>
-              <a:t>- Create, join, leave, delete servers</a:t>
-            </a:r>
-          </a:p>
-          <a:p>
-            <a:r>
-              <a:t>- Invite codes with expiry + max uses</a:t>
-            </a:r>
-          </a:p>
-          <a:p>
-            <a:r>
-              <a:t>- Roles: owner, admin, member</a:t>
-            </a:r>
-          </a:p>
-          <a:p>
-            <a:r>
-              <a:t>- Role controls channel and member actions</a:t>
-            </a:r>
+          <a:bodyPr lIns="90000" rIns="90000" tIns="45000" bIns="45000" anchor="t">
+            <a:noAutofit/>
+          </a:bodyPr>
+          <a:p>
+            <a:pPr>
+              <a:lnSpc>
+                <a:spcPct val="100000"/>
+              </a:lnSpc>
+            </a:pPr>
+            <a:r>
+              <a:rPr lang="en-GB" sz="1800" b="0" u="none" strike="noStrike">
+                <a:solidFill>
+                  <a:srgbClr val="000000"/>
+                </a:solidFill>
+                <a:effectLst/>
+                <a:uFillTx/>
+                <a:latin typeface="Arial"/>
+              </a:rPr>
+              <a:t>- App router pages: login, register, home, servers, dm</a:t>
+            </a:r>
+            <a:endParaRPr lang="en-GB" sz="1800" b="0" u="none" strike="noStrike">
+              <a:solidFill>
+                <a:srgbClr val="000000"/>
+              </a:solidFill>
+              <a:effectLst/>
+              <a:uFillTx/>
+              <a:latin typeface="Arial"/>
+            </a:endParaRPr>
+          </a:p>
+          <a:p>
+            <a:pPr>
+              <a:lnSpc>
+                <a:spcPct val="100000"/>
+              </a:lnSpc>
+            </a:pPr>
+            <a:r>
+              <a:rPr lang="en-GB" sz="1800" b="0" u="none" strike="noStrike">
+                <a:solidFill>
+                  <a:srgbClr val="000000"/>
+                </a:solidFill>
+                <a:effectLst/>
+                <a:uFillTx/>
+                <a:latin typeface="Arial"/>
+              </a:rPr>
+              <a:t>- UI components under components/</a:t>
+            </a:r>
+            <a:endParaRPr lang="en-GB" sz="1800" b="0" u="none" strike="noStrike">
+              <a:solidFill>
+                <a:srgbClr val="000000"/>
+              </a:solidFill>
+              <a:effectLst/>
+              <a:uFillTx/>
+              <a:latin typeface="Arial"/>
+            </a:endParaRPr>
+          </a:p>
+          <a:p>
+            <a:pPr>
+              <a:lnSpc>
+                <a:spcPct val="100000"/>
+              </a:lnSpc>
+            </a:pPr>
+            <a:r>
+              <a:rPr lang="en-GB" sz="1800" b="0" u="none" strike="noStrike">
+                <a:solidFill>
+                  <a:srgbClr val="000000"/>
+                </a:solidFill>
+                <a:effectLst/>
+                <a:uFillTx/>
+                <a:latin typeface="Arial"/>
+              </a:rPr>
+              <a:t>- API routes proxy backend</a:t>
+            </a:r>
+            <a:endParaRPr lang="en-GB" sz="1800" b="0" u="none" strike="noStrike">
+              <a:solidFill>
+                <a:srgbClr val="000000"/>
+              </a:solidFill>
+              <a:effectLst/>
+              <a:uFillTx/>
+              <a:latin typeface="Arial"/>
+            </a:endParaRPr>
+          </a:p>
+          <a:p>
+            <a:pPr>
+              <a:lnSpc>
+                <a:spcPct val="100000"/>
+              </a:lnSpc>
+            </a:pPr>
+            <a:r>
+              <a:rPr lang="en-GB" sz="1800" b="0" u="none" strike="noStrike">
+                <a:solidFill>
+                  <a:srgbClr val="000000"/>
+                </a:solidFill>
+                <a:effectLst/>
+                <a:uFillTx/>
+                <a:latin typeface="Arial"/>
+              </a:rPr>
+              <a:t>- WebSocket client for live updates</a:t>
+            </a:r>
+            <a:endParaRPr lang="en-GB" sz="1800" b="0" u="none" strike="noStrike">
+              <a:solidFill>
+                <a:srgbClr val="000000"/>
+              </a:solidFill>
+              <a:effectLst/>
+              <a:uFillTx/>
+              <a:latin typeface="Arial"/>
+            </a:endParaRPr>
+          </a:p>
+          <a:p>
+            <a:pPr>
+              <a:lnSpc>
+                <a:spcPct val="100000"/>
+              </a:lnSpc>
+            </a:pPr>
+            <a:r>
+              <a:rPr lang="en-GB" sz="1800" b="0" u="none" strike="noStrike">
+                <a:solidFill>
+                  <a:srgbClr val="000000"/>
+                </a:solidFill>
+                <a:effectLst/>
+                <a:uFillTx/>
+                <a:latin typeface="Arial"/>
+              </a:rPr>
+              <a:t>- Tailwind + custom CSS</a:t>
+            </a:r>
+            <a:endParaRPr lang="en-GB" sz="1800" b="0" u="none" strike="noStrike">
+              <a:solidFill>
+                <a:srgbClr val="000000"/>
+              </a:solidFill>
+              <a:effectLst/>
+              <a:uFillTx/>
+              <a:latin typeface="Arial"/>
+            </a:endParaRPr>
           </a:p>
         </p:txBody>
       </p:sp>
     </p:spTree>
   </p:cSld>
-  <p:clrMapOvr>
-    <a:masterClrMapping/>
-  </p:clrMapOvr>
+  <mc:AlternateContent>
+    <mc:Choice Requires="p14">
+      <p:transition spd="slow" p14:dur="2000"/>
+    </mc:Choice>
+    <mc:Fallback>
+      <p:transition spd="slow"/>
+    </mc:Fallback>
+  </mc:AlternateContent>
 </p:sld>
 </file>
 
-<file path=ppt/slides/slide8.xml><?xml version="1.0" encoding="utf-8"?>
-<p:sld xmlns:a="http://schemas.openxmlformats.org/drawingml/2006/main" xmlns:r="http://schemas.openxmlformats.org/officeDocument/2006/relationships" xmlns:p="http://schemas.openxmlformats.org/presentationml/2006/main">
+<file path=ppt/slides/slide6.xml><?xml version="1.0" encoding="utf-8"?>
+<p:sld xmlns:a="http://schemas.openxmlformats.org/drawingml/2006/main" xmlns:p="http://schemas.openxmlformats.org/presentationml/2006/main" xmlns:r="http://schemas.openxmlformats.org/officeDocument/2006/relationships" xmlns:p14="http://schemas.microsoft.com/office/powerpoint/2010/main" xmlns:p15="http://schemas.microsoft.com/office/powerpoint/2012/main" xmlns:mc="http://schemas.openxmlformats.org/markup-compatibility/2006">
   <p:cSld>
     <p:spTree>
       <p:nvGrpSpPr>
@@ -1555,79 +3875,237 @@
       </p:grpSpPr>
       <p:sp>
         <p:nvSpPr>
-          <p:cNvPr id="2" name="Title"/>
+          <p:cNvPr id="18" name="Title"/>
           <p:cNvSpPr/>
           <p:nvPr/>
         </p:nvSpPr>
         <p:spPr>
           <a:xfrm>
             <a:off x="457200" y="228600"/>
-            <a:ext cx="11176000" cy="685800"/>
+            <a:ext cx="11175480" cy="685440"/>
           </a:xfrm>
           <a:prstGeom prst="rect">
             <a:avLst/>
           </a:prstGeom>
+          <a:noFill/>
+          <a:ln w="0">
+            <a:noFill/>
+          </a:ln>
         </p:spPr>
+        <p:style>
+          <a:lnRef idx="0"/>
+          <a:fillRef idx="0"/>
+          <a:effectRef idx="0"/>
+          <a:fontRef idx="minor"/>
+        </p:style>
         <p:txBody>
-          <a:bodyPr/>
-          <a:lstStyle/>
-          <a:p>
-            <a:r>
-              <a:t>Channels and Messages</a:t>
-            </a:r>
+          <a:bodyPr lIns="90000" rIns="90000" tIns="45000" bIns="45000" anchor="t">
+            <a:noAutofit/>
+          </a:bodyPr>
+          <a:p>
+            <a:pPr>
+              <a:lnSpc>
+                <a:spcPct val="100000"/>
+              </a:lnSpc>
+            </a:pPr>
+            <a:r>
+              <a:rPr lang="en-GB" sz="1800" b="0" u="none" strike="noStrike">
+                <a:solidFill>
+                  <a:srgbClr val="000000"/>
+                </a:solidFill>
+                <a:effectLst/>
+                <a:uFillTx/>
+                <a:latin typeface="Arial"/>
+              </a:rPr>
+              <a:t>Backend (Rust + Axum)</a:t>
+            </a:r>
+            <a:endParaRPr lang="en-GB" sz="1800" b="0" u="none" strike="noStrike">
+              <a:solidFill>
+                <a:srgbClr val="000000"/>
+              </a:solidFill>
+              <a:effectLst/>
+              <a:uFillTx/>
+              <a:latin typeface="Arial"/>
+            </a:endParaRPr>
           </a:p>
         </p:txBody>
       </p:sp>
       <p:sp>
         <p:nvSpPr>
-          <p:cNvPr id="3" name="Body"/>
+          <p:cNvPr id="19" name="Body"/>
           <p:cNvSpPr/>
           <p:nvPr/>
         </p:nvSpPr>
         <p:spPr>
           <a:xfrm>
             <a:off x="685800" y="1371600"/>
-            <a:ext cx="10800000" cy="4572000"/>
+            <a:ext cx="10799640" cy="4571640"/>
           </a:xfrm>
           <a:prstGeom prst="rect">
             <a:avLst/>
           </a:prstGeom>
+          <a:noFill/>
+          <a:ln w="0">
+            <a:noFill/>
+          </a:ln>
         </p:spPr>
+        <p:style>
+          <a:lnRef idx="0"/>
+          <a:fillRef idx="0"/>
+          <a:effectRef idx="0"/>
+          <a:fontRef idx="minor"/>
+        </p:style>
         <p:txBody>
-          <a:bodyPr wrap="square"/>
-          <a:lstStyle/>
-          <a:p>
-            <a:r>
-              <a:t>- Create, rename, delete channels</a:t>
-            </a:r>
-          </a:p>
-          <a:p>
-            <a:r>
-              <a:t>- WebSocket send/receive channel messages</a:t>
-            </a:r>
-          </a:p>
-          <a:p>
-            <a:r>
-              <a:t>- REST fallback for send/edit/delete</a:t>
-            </a:r>
-          </a:p>
-          <a:p>
-            <a:r>
-              <a:t>- Message persistence + pin + reactions</a:t>
-            </a:r>
+          <a:bodyPr lIns="90000" rIns="90000" tIns="45000" bIns="45000" anchor="t">
+            <a:noAutofit/>
+          </a:bodyPr>
+          <a:p>
+            <a:pPr>
+              <a:lnSpc>
+                <a:spcPct val="100000"/>
+              </a:lnSpc>
+            </a:pPr>
+            <a:r>
+              <a:rPr lang="en-GB" sz="1800" b="0" u="none" strike="noStrike">
+                <a:solidFill>
+                  <a:srgbClr val="000000"/>
+                </a:solidFill>
+                <a:effectLst/>
+                <a:uFillTx/>
+                <a:latin typeface="Arial"/>
+              </a:rPr>
+              <a:t>- REST + WebSocket in one server</a:t>
+            </a:r>
+            <a:endParaRPr lang="en-GB" sz="1800" b="0" u="none" strike="noStrike">
+              <a:solidFill>
+                <a:srgbClr val="000000"/>
+              </a:solidFill>
+              <a:effectLst/>
+              <a:uFillTx/>
+              <a:latin typeface="Arial"/>
+            </a:endParaRPr>
+          </a:p>
+          <a:p>
+            <a:pPr>
+              <a:lnSpc>
+                <a:spcPct val="100000"/>
+              </a:lnSpc>
+            </a:pPr>
+            <a:r>
+              <a:rPr lang="en-GB" sz="1800" b="0" u="none" strike="noStrike">
+                <a:solidFill>
+                  <a:srgbClr val="000000"/>
+                </a:solidFill>
+                <a:effectLst/>
+                <a:uFillTx/>
+                <a:latin typeface="Arial"/>
+              </a:rPr>
+              <a:t>- SQLx with migrations</a:t>
+            </a:r>
+            <a:endParaRPr lang="en-GB" sz="1800" b="0" u="none" strike="noStrike">
+              <a:solidFill>
+                <a:srgbClr val="000000"/>
+              </a:solidFill>
+              <a:effectLst/>
+              <a:uFillTx/>
+              <a:latin typeface="Arial"/>
+            </a:endParaRPr>
+          </a:p>
+          <a:p>
+            <a:pPr>
+              <a:lnSpc>
+                <a:spcPct val="100000"/>
+              </a:lnSpc>
+            </a:pPr>
+            <a:r>
+              <a:rPr lang="en-GB" sz="1800" b="0" u="none" strike="noStrike">
+                <a:solidFill>
+                  <a:srgbClr val="000000"/>
+                </a:solidFill>
+                <a:effectLst/>
+                <a:uFillTx/>
+                <a:latin typeface="Arial"/>
+              </a:rPr>
+              <a:t>- JWT auth and token revocation</a:t>
+            </a:r>
+            <a:endParaRPr lang="en-GB" sz="1800" b="0" u="none" strike="noStrike">
+              <a:solidFill>
+                <a:srgbClr val="000000"/>
+              </a:solidFill>
+              <a:effectLst/>
+              <a:uFillTx/>
+              <a:latin typeface="Arial"/>
+            </a:endParaRPr>
+          </a:p>
+          <a:p>
+            <a:pPr>
+              <a:lnSpc>
+                <a:spcPct val="100000"/>
+              </a:lnSpc>
+            </a:pPr>
+            <a:r>
+              <a:rPr lang="en-GB" sz="1800" b="0" u="none" strike="noStrike">
+                <a:solidFill>
+                  <a:srgbClr val="000000"/>
+                </a:solidFill>
+                <a:effectLst/>
+                <a:uFillTx/>
+                <a:latin typeface="Arial"/>
+              </a:rPr>
+              <a:t>- Role-based permissions (owner/admin/member)</a:t>
+            </a:r>
+            <a:endParaRPr lang="en-GB" sz="1800" b="0" u="none" strike="noStrike">
+              <a:solidFill>
+                <a:srgbClr val="000000"/>
+              </a:solidFill>
+              <a:effectLst/>
+              <a:uFillTx/>
+              <a:latin typeface="Arial"/>
+            </a:endParaRPr>
+          </a:p>
+          <a:p>
+            <a:pPr>
+              <a:lnSpc>
+                <a:spcPct val="100000"/>
+              </a:lnSpc>
+            </a:pPr>
+            <a:r>
+              <a:rPr lang="en-GB" sz="1800" b="0" u="none" strike="noStrike">
+                <a:solidFill>
+                  <a:srgbClr val="000000"/>
+                </a:solidFill>
+                <a:effectLst/>
+                <a:uFillTx/>
+                <a:latin typeface="Arial"/>
+              </a:rPr>
+              <a:t>- Presence and typing state in memory</a:t>
+            </a:r>
+            <a:endParaRPr lang="en-GB" sz="1800" b="0" u="none" strike="noStrike">
+              <a:solidFill>
+                <a:srgbClr val="000000"/>
+              </a:solidFill>
+              <a:effectLst/>
+              <a:uFillTx/>
+              <a:latin typeface="Arial"/>
+            </a:endParaRPr>
           </a:p>
         </p:txBody>
       </p:sp>
     </p:spTree>
   </p:cSld>
-  <p:clrMapOvr>
-    <a:masterClrMapping/>
-  </p:clrMapOvr>
+  <mc:AlternateContent>
+    <mc:Choice Requires="p14">
+      <p:transition spd="slow" p14:dur="2000"/>
+    </mc:Choice>
+    <mc:Fallback>
+      <p:transition spd="slow"/>
+    </mc:Fallback>
+  </mc:AlternateContent>
 </p:sld>
 </file>
 
-<file path=ppt/slides/slide9.xml><?xml version="1.0" encoding="utf-8"?>
-<p:sld xmlns:a="http://schemas.openxmlformats.org/drawingml/2006/main" xmlns:r="http://schemas.openxmlformats.org/officeDocument/2006/relationships" xmlns:p="http://schemas.openxmlformats.org/presentationml/2006/main">
+<file path=ppt/slides/slide7.xml><?xml version="1.0" encoding="utf-8"?>
+<p:sld xmlns:a="http://schemas.openxmlformats.org/drawingml/2006/main" xmlns:p="http://schemas.openxmlformats.org/presentationml/2006/main" xmlns:r="http://schemas.openxmlformats.org/officeDocument/2006/relationships" xmlns:p14="http://schemas.microsoft.com/office/powerpoint/2010/main" xmlns:p15="http://schemas.microsoft.com/office/powerpoint/2012/main" xmlns:mc="http://schemas.openxmlformats.org/markup-compatibility/2006">
   <p:cSld>
     <p:spTree>
       <p:nvGrpSpPr>
@@ -1645,113 +4123,689 @@
       </p:grpSpPr>
       <p:sp>
         <p:nvSpPr>
-          <p:cNvPr id="2" name="Title"/>
+          <p:cNvPr id="20" name="Title"/>
           <p:cNvSpPr/>
           <p:nvPr/>
         </p:nvSpPr>
         <p:spPr>
           <a:xfrm>
             <a:off x="457200" y="228600"/>
-            <a:ext cx="11176000" cy="685800"/>
+            <a:ext cx="11175480" cy="685440"/>
           </a:xfrm>
           <a:prstGeom prst="rect">
             <a:avLst/>
           </a:prstGeom>
+          <a:noFill/>
+          <a:ln w="0">
+            <a:noFill/>
+          </a:ln>
         </p:spPr>
+        <p:style>
+          <a:lnRef idx="0"/>
+          <a:fillRef idx="0"/>
+          <a:effectRef idx="0"/>
+          <a:fontRef idx="minor"/>
+        </p:style>
         <p:txBody>
-          <a:bodyPr/>
-          <a:lstStyle/>
-          <a:p>
-            <a:r>
-              <a:t>Direct Messages + Friends</a:t>
-            </a:r>
+          <a:bodyPr lIns="90000" rIns="90000" tIns="45000" bIns="45000" anchor="t">
+            <a:noAutofit/>
+          </a:bodyPr>
+          <a:p>
+            <a:pPr>
+              <a:lnSpc>
+                <a:spcPct val="100000"/>
+              </a:lnSpc>
+            </a:pPr>
+            <a:r>
+              <a:rPr lang="en-GB" sz="1800" b="0" u="none" strike="noStrike">
+                <a:solidFill>
+                  <a:srgbClr val="000000"/>
+                </a:solidFill>
+                <a:effectLst/>
+                <a:uFillTx/>
+                <a:latin typeface="Arial"/>
+              </a:rPr>
+              <a:t>Authentication Flow</a:t>
+            </a:r>
+            <a:endParaRPr lang="en-GB" sz="1800" b="0" u="none" strike="noStrike">
+              <a:solidFill>
+                <a:srgbClr val="000000"/>
+              </a:solidFill>
+              <a:effectLst/>
+              <a:uFillTx/>
+              <a:latin typeface="Arial"/>
+            </a:endParaRPr>
           </a:p>
         </p:txBody>
       </p:sp>
       <p:sp>
         <p:nvSpPr>
-          <p:cNvPr id="3" name="Body"/>
+          <p:cNvPr id="21" name="Body"/>
           <p:cNvSpPr/>
           <p:nvPr/>
         </p:nvSpPr>
         <p:spPr>
           <a:xfrm>
             <a:off x="685800" y="1371600"/>
-            <a:ext cx="10800000" cy="4572000"/>
+            <a:ext cx="10799640" cy="4571640"/>
           </a:xfrm>
           <a:prstGeom prst="rect">
             <a:avLst/>
           </a:prstGeom>
+          <a:noFill/>
+          <a:ln w="0">
+            <a:noFill/>
+          </a:ln>
         </p:spPr>
+        <p:style>
+          <a:lnRef idx="0"/>
+          <a:fillRef idx="0"/>
+          <a:effectRef idx="0"/>
+          <a:fontRef idx="minor"/>
+        </p:style>
         <p:txBody>
-          <a:bodyPr wrap="square"/>
-          <a:lstStyle/>
-          <a:p>
-            <a:r>
-              <a:t>- Friend requests via friend code</a:t>
-            </a:r>
-          </a:p>
-          <a:p>
-            <a:r>
-              <a:t>- Accept/decline requests</a:t>
-            </a:r>
-          </a:p>
-          <a:p>
-            <a:r>
-              <a:t>- Direct message threads</a:t>
-            </a:r>
-          </a:p>
-          <a:p>
-            <a:r>
-              <a:t>- Typing and status updates over WS</a:t>
-            </a:r>
+          <a:bodyPr lIns="90000" rIns="90000" tIns="45000" bIns="45000" anchor="t">
+            <a:noAutofit/>
+          </a:bodyPr>
+          <a:p>
+            <a:pPr>
+              <a:lnSpc>
+                <a:spcPct val="100000"/>
+              </a:lnSpc>
+            </a:pPr>
+            <a:r>
+              <a:rPr lang="en-GB" sz="1800" b="0" u="none" strike="noStrike">
+                <a:solidFill>
+                  <a:srgbClr val="000000"/>
+                </a:solidFill>
+                <a:effectLst/>
+                <a:uFillTx/>
+                <a:latin typeface="Arial"/>
+              </a:rPr>
+              <a:t>- Signup -&gt; hash password (argon2)</a:t>
+            </a:r>
+            <a:endParaRPr lang="en-GB" sz="1800" b="0" u="none" strike="noStrike">
+              <a:solidFill>
+                <a:srgbClr val="000000"/>
+              </a:solidFill>
+              <a:effectLst/>
+              <a:uFillTx/>
+              <a:latin typeface="Arial"/>
+            </a:endParaRPr>
+          </a:p>
+          <a:p>
+            <a:pPr>
+              <a:lnSpc>
+                <a:spcPct val="100000"/>
+              </a:lnSpc>
+            </a:pPr>
+            <a:r>
+              <a:rPr lang="en-GB" sz="1800" b="0" u="none" strike="noStrike">
+                <a:solidFill>
+                  <a:srgbClr val="000000"/>
+                </a:solidFill>
+                <a:effectLst/>
+                <a:uFillTx/>
+                <a:latin typeface="Arial"/>
+              </a:rPr>
+              <a:t>- Login -&gt; issue JWT + set auth_token cookie</a:t>
+            </a:r>
+            <a:endParaRPr lang="en-GB" sz="1800" b="0" u="none" strike="noStrike">
+              <a:solidFill>
+                <a:srgbClr val="000000"/>
+              </a:solidFill>
+              <a:effectLst/>
+              <a:uFillTx/>
+              <a:latin typeface="Arial"/>
+            </a:endParaRPr>
+          </a:p>
+          <a:p>
+            <a:pPr>
+              <a:lnSpc>
+                <a:spcPct val="100000"/>
+              </a:lnSpc>
+            </a:pPr>
+            <a:r>
+              <a:rPr lang="en-GB" sz="1800" b="0" u="none" strike="noStrike">
+                <a:solidFill>
+                  <a:srgbClr val="000000"/>
+                </a:solidFill>
+                <a:effectLst/>
+                <a:uFillTx/>
+                <a:latin typeface="Arial"/>
+              </a:rPr>
+              <a:t>- Auth middleware validates JWT</a:t>
+            </a:r>
+            <a:endParaRPr lang="en-GB" sz="1800" b="0" u="none" strike="noStrike">
+              <a:solidFill>
+                <a:srgbClr val="000000"/>
+              </a:solidFill>
+              <a:effectLst/>
+              <a:uFillTx/>
+              <a:latin typeface="Arial"/>
+            </a:endParaRPr>
+          </a:p>
+          <a:p>
+            <a:pPr>
+              <a:lnSpc>
+                <a:spcPct val="100000"/>
+              </a:lnSpc>
+            </a:pPr>
+            <a:r>
+              <a:rPr lang="en-GB" sz="1800" b="0" u="none" strike="noStrike">
+                <a:solidFill>
+                  <a:srgbClr val="000000"/>
+                </a:solidFill>
+                <a:effectLst/>
+                <a:uFillTx/>
+                <a:latin typeface="Arial"/>
+              </a:rPr>
+              <a:t>- Profile update endpoint for username/email/password</a:t>
+            </a:r>
+            <a:endParaRPr lang="en-GB" sz="1800" b="0" u="none" strike="noStrike">
+              <a:solidFill>
+                <a:srgbClr val="000000"/>
+              </a:solidFill>
+              <a:effectLst/>
+              <a:uFillTx/>
+              <a:latin typeface="Arial"/>
+            </a:endParaRPr>
           </a:p>
         </p:txBody>
       </p:sp>
     </p:spTree>
   </p:cSld>
-  <p:clrMapOvr>
-    <a:masterClrMapping/>
-  </p:clrMapOvr>
+  <mc:AlternateContent>
+    <mc:Choice Requires="p14">
+      <p:transition spd="slow" p14:dur="2000"/>
+    </mc:Choice>
+    <mc:Fallback>
+      <p:transition spd="slow"/>
+    </mc:Fallback>
+  </mc:AlternateContent>
+</p:sld>
+</file>
+
+<file path=ppt/slides/slide8.xml><?xml version="1.0" encoding="utf-8"?>
+<p:sld xmlns:a="http://schemas.openxmlformats.org/drawingml/2006/main" xmlns:p="http://schemas.openxmlformats.org/presentationml/2006/main" xmlns:r="http://schemas.openxmlformats.org/officeDocument/2006/relationships" xmlns:p14="http://schemas.microsoft.com/office/powerpoint/2010/main" xmlns:p15="http://schemas.microsoft.com/office/powerpoint/2012/main" xmlns:mc="http://schemas.openxmlformats.org/markup-compatibility/2006">
+  <p:cSld>
+    <p:spTree>
+      <p:nvGrpSpPr>
+        <p:cNvPr id="1" name=""/>
+        <p:cNvGrpSpPr/>
+        <p:nvPr/>
+      </p:nvGrpSpPr>
+      <p:grpSpPr>
+        <a:xfrm>
+          <a:off x="0" y="0"/>
+          <a:ext cx="0" cy="0"/>
+          <a:chOff x="0" y="0"/>
+          <a:chExt cx="0" cy="0"/>
+        </a:xfrm>
+      </p:grpSpPr>
+      <p:sp>
+        <p:nvSpPr>
+          <p:cNvPr id="22" name="Title"/>
+          <p:cNvSpPr/>
+          <p:nvPr/>
+        </p:nvSpPr>
+        <p:spPr>
+          <a:xfrm>
+            <a:off x="457200" y="228600"/>
+            <a:ext cx="11175480" cy="685440"/>
+          </a:xfrm>
+          <a:prstGeom prst="rect">
+            <a:avLst/>
+          </a:prstGeom>
+          <a:noFill/>
+          <a:ln w="0">
+            <a:noFill/>
+          </a:ln>
+        </p:spPr>
+        <p:style>
+          <a:lnRef idx="0"/>
+          <a:fillRef idx="0"/>
+          <a:effectRef idx="0"/>
+          <a:fontRef idx="minor"/>
+        </p:style>
+        <p:txBody>
+          <a:bodyPr lIns="90000" rIns="90000" tIns="45000" bIns="45000" anchor="t">
+            <a:noAutofit/>
+          </a:bodyPr>
+          <a:p>
+            <a:pPr>
+              <a:lnSpc>
+                <a:spcPct val="100000"/>
+              </a:lnSpc>
+            </a:pPr>
+            <a:r>
+              <a:rPr lang="en-GB" sz="1800" b="0" u="none" strike="noStrike">
+                <a:solidFill>
+                  <a:srgbClr val="000000"/>
+                </a:solidFill>
+                <a:effectLst/>
+                <a:uFillTx/>
+                <a:latin typeface="Arial"/>
+              </a:rPr>
+              <a:t>Servers and Roles</a:t>
+            </a:r>
+            <a:endParaRPr lang="en-GB" sz="1800" b="0" u="none" strike="noStrike">
+              <a:solidFill>
+                <a:srgbClr val="000000"/>
+              </a:solidFill>
+              <a:effectLst/>
+              <a:uFillTx/>
+              <a:latin typeface="Arial"/>
+            </a:endParaRPr>
+          </a:p>
+        </p:txBody>
+      </p:sp>
+      <p:sp>
+        <p:nvSpPr>
+          <p:cNvPr id="23" name="Body"/>
+          <p:cNvSpPr/>
+          <p:nvPr/>
+        </p:nvSpPr>
+        <p:spPr>
+          <a:xfrm>
+            <a:off x="685800" y="1371600"/>
+            <a:ext cx="10799640" cy="4571640"/>
+          </a:xfrm>
+          <a:prstGeom prst="rect">
+            <a:avLst/>
+          </a:prstGeom>
+          <a:noFill/>
+          <a:ln w="0">
+            <a:noFill/>
+          </a:ln>
+        </p:spPr>
+        <p:style>
+          <a:lnRef idx="0"/>
+          <a:fillRef idx="0"/>
+          <a:effectRef idx="0"/>
+          <a:fontRef idx="minor"/>
+        </p:style>
+        <p:txBody>
+          <a:bodyPr lIns="90000" rIns="90000" tIns="45000" bIns="45000" anchor="t">
+            <a:noAutofit/>
+          </a:bodyPr>
+          <a:p>
+            <a:pPr>
+              <a:lnSpc>
+                <a:spcPct val="100000"/>
+              </a:lnSpc>
+            </a:pPr>
+            <a:r>
+              <a:rPr lang="en-GB" sz="1800" b="0" u="none" strike="noStrike">
+                <a:solidFill>
+                  <a:srgbClr val="000000"/>
+                </a:solidFill>
+                <a:effectLst/>
+                <a:uFillTx/>
+                <a:latin typeface="Arial"/>
+              </a:rPr>
+              <a:t>- Create, join, leave, delete servers</a:t>
+            </a:r>
+            <a:endParaRPr lang="en-GB" sz="1800" b="0" u="none" strike="noStrike">
+              <a:solidFill>
+                <a:srgbClr val="000000"/>
+              </a:solidFill>
+              <a:effectLst/>
+              <a:uFillTx/>
+              <a:latin typeface="Arial"/>
+            </a:endParaRPr>
+          </a:p>
+          <a:p>
+            <a:pPr>
+              <a:lnSpc>
+                <a:spcPct val="100000"/>
+              </a:lnSpc>
+            </a:pPr>
+            <a:r>
+              <a:rPr lang="en-GB" sz="1800" b="0" u="none" strike="noStrike">
+                <a:solidFill>
+                  <a:srgbClr val="000000"/>
+                </a:solidFill>
+                <a:effectLst/>
+                <a:uFillTx/>
+                <a:latin typeface="Arial"/>
+              </a:rPr>
+              <a:t>- Invite codes with expiry + max uses</a:t>
+            </a:r>
+            <a:endParaRPr lang="en-GB" sz="1800" b="0" u="none" strike="noStrike">
+              <a:solidFill>
+                <a:srgbClr val="000000"/>
+              </a:solidFill>
+              <a:effectLst/>
+              <a:uFillTx/>
+              <a:latin typeface="Arial"/>
+            </a:endParaRPr>
+          </a:p>
+          <a:p>
+            <a:pPr>
+              <a:lnSpc>
+                <a:spcPct val="100000"/>
+              </a:lnSpc>
+            </a:pPr>
+            <a:r>
+              <a:rPr lang="en-GB" sz="1800" b="0" u="none" strike="noStrike">
+                <a:solidFill>
+                  <a:srgbClr val="000000"/>
+                </a:solidFill>
+                <a:effectLst/>
+                <a:uFillTx/>
+                <a:latin typeface="Arial"/>
+              </a:rPr>
+              <a:t>- Roles: owner, admin, member</a:t>
+            </a:r>
+            <a:endParaRPr lang="en-GB" sz="1800" b="0" u="none" strike="noStrike">
+              <a:solidFill>
+                <a:srgbClr val="000000"/>
+              </a:solidFill>
+              <a:effectLst/>
+              <a:uFillTx/>
+              <a:latin typeface="Arial"/>
+            </a:endParaRPr>
+          </a:p>
+          <a:p>
+            <a:pPr>
+              <a:lnSpc>
+                <a:spcPct val="100000"/>
+              </a:lnSpc>
+            </a:pPr>
+            <a:r>
+              <a:rPr lang="en-GB" sz="1800" b="0" u="none" strike="noStrike">
+                <a:solidFill>
+                  <a:srgbClr val="000000"/>
+                </a:solidFill>
+                <a:effectLst/>
+                <a:uFillTx/>
+                <a:latin typeface="Arial"/>
+              </a:rPr>
+              <a:t>- Role controls channel and member actions</a:t>
+            </a:r>
+            <a:endParaRPr lang="en-GB" sz="1800" b="0" u="none" strike="noStrike">
+              <a:solidFill>
+                <a:srgbClr val="000000"/>
+              </a:solidFill>
+              <a:effectLst/>
+              <a:uFillTx/>
+              <a:latin typeface="Arial"/>
+            </a:endParaRPr>
+          </a:p>
+        </p:txBody>
+      </p:sp>
+    </p:spTree>
+  </p:cSld>
+  <mc:AlternateContent>
+    <mc:Choice Requires="p14">
+      <p:transition spd="slow" p14:dur="2000"/>
+    </mc:Choice>
+    <mc:Fallback>
+      <p:transition spd="slow"/>
+    </mc:Fallback>
+  </mc:AlternateContent>
+</p:sld>
+</file>
+
+<file path=ppt/slides/slide9.xml><?xml version="1.0" encoding="utf-8"?>
+<p:sld xmlns:a="http://schemas.openxmlformats.org/drawingml/2006/main" xmlns:p="http://schemas.openxmlformats.org/presentationml/2006/main" xmlns:r="http://schemas.openxmlformats.org/officeDocument/2006/relationships" xmlns:p14="http://schemas.microsoft.com/office/powerpoint/2010/main" xmlns:p15="http://schemas.microsoft.com/office/powerpoint/2012/main" xmlns:mc="http://schemas.openxmlformats.org/markup-compatibility/2006">
+  <p:cSld>
+    <p:spTree>
+      <p:nvGrpSpPr>
+        <p:cNvPr id="1" name=""/>
+        <p:cNvGrpSpPr/>
+        <p:nvPr/>
+      </p:nvGrpSpPr>
+      <p:grpSpPr>
+        <a:xfrm>
+          <a:off x="0" y="0"/>
+          <a:ext cx="0" cy="0"/>
+          <a:chOff x="0" y="0"/>
+          <a:chExt cx="0" cy="0"/>
+        </a:xfrm>
+      </p:grpSpPr>
+      <p:sp>
+        <p:nvSpPr>
+          <p:cNvPr id="24" name="Title"/>
+          <p:cNvSpPr/>
+          <p:nvPr/>
+        </p:nvSpPr>
+        <p:spPr>
+          <a:xfrm>
+            <a:off x="457200" y="228600"/>
+            <a:ext cx="11175480" cy="685440"/>
+          </a:xfrm>
+          <a:prstGeom prst="rect">
+            <a:avLst/>
+          </a:prstGeom>
+          <a:noFill/>
+          <a:ln w="0">
+            <a:noFill/>
+          </a:ln>
+        </p:spPr>
+        <p:style>
+          <a:lnRef idx="0"/>
+          <a:fillRef idx="0"/>
+          <a:effectRef idx="0"/>
+          <a:fontRef idx="minor"/>
+        </p:style>
+        <p:txBody>
+          <a:bodyPr lIns="90000" rIns="90000" tIns="45000" bIns="45000" anchor="t">
+            <a:noAutofit/>
+          </a:bodyPr>
+          <a:p>
+            <a:pPr>
+              <a:lnSpc>
+                <a:spcPct val="100000"/>
+              </a:lnSpc>
+            </a:pPr>
+            <a:r>
+              <a:rPr lang="en-GB" sz="1800" b="0" u="none" strike="noStrike">
+                <a:solidFill>
+                  <a:srgbClr val="000000"/>
+                </a:solidFill>
+                <a:effectLst/>
+                <a:uFillTx/>
+                <a:latin typeface="Arial"/>
+              </a:rPr>
+              <a:t>Channels and Messages</a:t>
+            </a:r>
+            <a:endParaRPr lang="en-GB" sz="1800" b="0" u="none" strike="noStrike">
+              <a:solidFill>
+                <a:srgbClr val="000000"/>
+              </a:solidFill>
+              <a:effectLst/>
+              <a:uFillTx/>
+              <a:latin typeface="Arial"/>
+            </a:endParaRPr>
+          </a:p>
+        </p:txBody>
+      </p:sp>
+      <p:sp>
+        <p:nvSpPr>
+          <p:cNvPr id="25" name="Body"/>
+          <p:cNvSpPr/>
+          <p:nvPr/>
+        </p:nvSpPr>
+        <p:spPr>
+          <a:xfrm>
+            <a:off x="685800" y="1371600"/>
+            <a:ext cx="10799640" cy="4571640"/>
+          </a:xfrm>
+          <a:prstGeom prst="rect">
+            <a:avLst/>
+          </a:prstGeom>
+          <a:noFill/>
+          <a:ln w="0">
+            <a:noFill/>
+          </a:ln>
+        </p:spPr>
+        <p:style>
+          <a:lnRef idx="0"/>
+          <a:fillRef idx="0"/>
+          <a:effectRef idx="0"/>
+          <a:fontRef idx="minor"/>
+        </p:style>
+        <p:txBody>
+          <a:bodyPr lIns="90000" rIns="90000" tIns="45000" bIns="45000" anchor="t">
+            <a:noAutofit/>
+          </a:bodyPr>
+          <a:p>
+            <a:pPr>
+              <a:lnSpc>
+                <a:spcPct val="100000"/>
+              </a:lnSpc>
+            </a:pPr>
+            <a:r>
+              <a:rPr lang="en-GB" sz="1800" b="0" u="none" strike="noStrike">
+                <a:solidFill>
+                  <a:srgbClr val="000000"/>
+                </a:solidFill>
+                <a:effectLst/>
+                <a:uFillTx/>
+                <a:latin typeface="Arial"/>
+              </a:rPr>
+              <a:t>- Create, rename, delete channels</a:t>
+            </a:r>
+            <a:endParaRPr lang="en-GB" sz="1800" b="0" u="none" strike="noStrike">
+              <a:solidFill>
+                <a:srgbClr val="000000"/>
+              </a:solidFill>
+              <a:effectLst/>
+              <a:uFillTx/>
+              <a:latin typeface="Arial"/>
+            </a:endParaRPr>
+          </a:p>
+          <a:p>
+            <a:pPr>
+              <a:lnSpc>
+                <a:spcPct val="100000"/>
+              </a:lnSpc>
+            </a:pPr>
+            <a:r>
+              <a:rPr lang="en-GB" sz="1800" b="0" u="none" strike="noStrike">
+                <a:solidFill>
+                  <a:srgbClr val="000000"/>
+                </a:solidFill>
+                <a:effectLst/>
+                <a:uFillTx/>
+                <a:latin typeface="Arial"/>
+              </a:rPr>
+              <a:t>- WebSocket send/receive channel messages</a:t>
+            </a:r>
+            <a:endParaRPr lang="en-GB" sz="1800" b="0" u="none" strike="noStrike">
+              <a:solidFill>
+                <a:srgbClr val="000000"/>
+              </a:solidFill>
+              <a:effectLst/>
+              <a:uFillTx/>
+              <a:latin typeface="Arial"/>
+            </a:endParaRPr>
+          </a:p>
+          <a:p>
+            <a:pPr>
+              <a:lnSpc>
+                <a:spcPct val="100000"/>
+              </a:lnSpc>
+            </a:pPr>
+            <a:r>
+              <a:rPr lang="en-GB" sz="1800" b="0" u="none" strike="noStrike">
+                <a:solidFill>
+                  <a:srgbClr val="000000"/>
+                </a:solidFill>
+                <a:effectLst/>
+                <a:uFillTx/>
+                <a:latin typeface="Arial"/>
+              </a:rPr>
+              <a:t>- REST fallback for send/edit/delete</a:t>
+            </a:r>
+            <a:endParaRPr lang="en-GB" sz="1800" b="0" u="none" strike="noStrike">
+              <a:solidFill>
+                <a:srgbClr val="000000"/>
+              </a:solidFill>
+              <a:effectLst/>
+              <a:uFillTx/>
+              <a:latin typeface="Arial"/>
+            </a:endParaRPr>
+          </a:p>
+          <a:p>
+            <a:pPr>
+              <a:lnSpc>
+                <a:spcPct val="100000"/>
+              </a:lnSpc>
+            </a:pPr>
+            <a:r>
+              <a:rPr lang="en-GB" sz="1800" b="0" u="none" strike="noStrike">
+                <a:solidFill>
+                  <a:srgbClr val="000000"/>
+                </a:solidFill>
+                <a:effectLst/>
+                <a:uFillTx/>
+                <a:latin typeface="Arial"/>
+              </a:rPr>
+              <a:t>- Message persistence + pin + reactions</a:t>
+            </a:r>
+            <a:endParaRPr lang="en-GB" sz="1800" b="0" u="none" strike="noStrike">
+              <a:solidFill>
+                <a:srgbClr val="000000"/>
+              </a:solidFill>
+              <a:effectLst/>
+              <a:uFillTx/>
+              <a:latin typeface="Arial"/>
+            </a:endParaRPr>
+          </a:p>
+        </p:txBody>
+      </p:sp>
+    </p:spTree>
+  </p:cSld>
+  <mc:AlternateContent>
+    <mc:Choice Requires="p14">
+      <p:transition spd="slow" p14:dur="2000"/>
+    </mc:Choice>
+    <mc:Fallback>
+      <p:transition spd="slow"/>
+    </mc:Fallback>
+  </mc:AlternateContent>
 </p:sld>
 </file>
 
 <file path=ppt/theme/theme1.xml><?xml version="1.0" encoding="utf-8"?>
-<a:theme xmlns:a="http://schemas.openxmlformats.org/drawingml/2006/main" name="Default Theme">
+<a:theme xmlns:a="http://schemas.openxmlformats.org/drawingml/2006/main" xmlns:r="http://schemas.openxmlformats.org/officeDocument/2006/relationships" name="Default Theme">
   <a:themeElements>
     <a:clrScheme name="Default">
       <a:dk1>
         <a:srgbClr val="000000"/>
       </a:dk1>
       <a:lt1>
-        <a:srgbClr val="FFFFFF"/>
+        <a:srgbClr val="ffffff"/>
       </a:lt1>
       <a:dk2>
-        <a:srgbClr val="1F1F1F"/>
+        <a:srgbClr val="1f1f1f"/>
       </a:dk2>
       <a:lt2>
-        <a:srgbClr val="EEEEEE"/>
+        <a:srgbClr val="eeeeee"/>
       </a:lt2>
       <a:accent1>
-        <a:srgbClr val="4F81BD"/>
+        <a:srgbClr val="4f81bd"/>
       </a:accent1>
       <a:accent2>
-        <a:srgbClr val="C0504D"/>
+        <a:srgbClr val="c0504d"/>
       </a:accent2>
       <a:accent3>
-        <a:srgbClr val="9BBB59"/>
+        <a:srgbClr val="9bbb59"/>
       </a:accent3>
       <a:accent4>
-        <a:srgbClr val="8064A2"/>
+        <a:srgbClr val="8064a2"/>
       </a:accent4>
       <a:accent5>
-        <a:srgbClr val="4BACC6"/>
+        <a:srgbClr val="4bacc6"/>
       </a:accent5>
       <a:accent6>
-        <a:srgbClr val="F79646"/>
+        <a:srgbClr val="f79646"/>
       </a:accent6>
       <a:hlink>
-        <a:srgbClr val="0000FF"/>
+        <a:srgbClr val="0000ff"/>
       </a:hlink>
       <a:folHlink>
         <a:srgbClr val="800080"/>
@@ -1759,17 +4813,17 @@
     </a:clrScheme>
     <a:fontScheme name="Default">
       <a:majorFont>
-        <a:latin typeface="Calibri"/>
+        <a:latin typeface="Calibri" pitchFamily="0" charset="1"/>
         <a:ea typeface=""/>
         <a:cs typeface=""/>
       </a:majorFont>
       <a:minorFont>
-        <a:latin typeface="Calibri"/>
+        <a:latin typeface="Calibri" pitchFamily="0" charset="1"/>
         <a:ea typeface=""/>
         <a:cs typeface=""/>
       </a:minorFont>
     </a:fontScheme>
-    <a:fmtScheme name="Default">
+    <a:fmtScheme>
       <a:fillStyleLst>
         <a:solidFill>
           <a:schemeClr val="phClr"/>
@@ -1782,21 +4836,9 @@
         </a:solidFill>
       </a:fillStyleLst>
       <a:lnStyleLst>
-        <a:ln w="6350">
-          <a:solidFill>
-            <a:schemeClr val="phClr"/>
-          </a:solidFill>
-        </a:ln>
-        <a:ln w="12700">
-          <a:solidFill>
-            <a:schemeClr val="phClr"/>
-          </a:solidFill>
-        </a:ln>
-        <a:ln w="19050">
-          <a:solidFill>
-            <a:schemeClr val="phClr"/>
-          </a:solidFill>
-        </a:ln>
+        <a:ln w="6350"/>
+        <a:ln w="12700"/>
+        <a:ln w="19050"/>
       </a:lnStyleLst>
       <a:effectStyleLst>
         <a:effectStyle>
@@ -1822,7 +4864,5 @@
       </a:bgFillStyleLst>
     </a:fmtScheme>
   </a:themeElements>
-  <a:objectDefaults/>
-  <a:extraClrSchemeLst/>
 </a:theme>
 </file>
--- a/presentation/rtc_chat_project.pptx
+++ b/presentation/rtc_chat_project.pptx
@@ -661,7 +661,7 @@
                 <a:uFillTx/>
                 <a:latin typeface="Arial"/>
               </a:rPr>
-              <a:t>RTC Chat Project</a:t>
+              <a:t>RTC Chat Project – Who we are ?</a:t>
             </a:r>
             <a:endParaRPr lang="en-GB" sz="1800" b="0" u="none" strike="noStrike">
               <a:solidFill>
@@ -723,6 +723,70 @@
                 <a:latin typeface="Arial"/>
               </a:rPr>
               <a:t>Presentation of team</a:t>
+            </a:r>
+            <a:endParaRPr lang="en-GB" sz="1800" b="0" u="none" strike="noStrike">
+              <a:solidFill>
+                <a:srgbClr val="000000"/>
+              </a:solidFill>
+              <a:effectLst/>
+              <a:uFillTx/>
+              <a:latin typeface="Arial"/>
+            </a:endParaRPr>
+          </a:p>
+          <a:p>
+            <a:pPr marL="432000" indent="-324000">
+              <a:spcBef>
+                <a:spcPts val="1417"/>
+              </a:spcBef>
+              <a:buClr>
+                <a:srgbClr val="000000"/>
+              </a:buClr>
+              <a:buSzPct val="45000"/>
+              <a:buFont typeface="Wingdings" charset="2"/>
+              <a:buChar char=""/>
+            </a:pPr>
+            <a:r>
+              <a:rPr lang="en-GB" sz="1800" b="0" u="none" strike="noStrike">
+                <a:solidFill>
+                  <a:srgbClr val="000000"/>
+                </a:solidFill>
+                <a:effectLst/>
+                <a:uFillTx/>
+                <a:latin typeface="Arial"/>
+              </a:rPr>
+              <a:t>Why did we group together ?</a:t>
+            </a:r>
+            <a:endParaRPr lang="en-GB" sz="1800" b="0" u="none" strike="noStrike">
+              <a:solidFill>
+                <a:srgbClr val="000000"/>
+              </a:solidFill>
+              <a:effectLst/>
+              <a:uFillTx/>
+              <a:latin typeface="Arial"/>
+            </a:endParaRPr>
+          </a:p>
+          <a:p>
+            <a:pPr marL="432000" indent="-324000">
+              <a:spcBef>
+                <a:spcPts val="1417"/>
+              </a:spcBef>
+              <a:buClr>
+                <a:srgbClr val="000000"/>
+              </a:buClr>
+              <a:buSzPct val="45000"/>
+              <a:buFont typeface="Wingdings" charset="2"/>
+              <a:buChar char=""/>
+            </a:pPr>
+            <a:r>
+              <a:rPr lang="en-GB" sz="1800" b="0" u="none" strike="noStrike">
+                <a:solidFill>
+                  <a:srgbClr val="000000"/>
+                </a:solidFill>
+                <a:effectLst/>
+                <a:uFillTx/>
+                <a:latin typeface="Arial"/>
+              </a:rPr>
+              <a:t>What did we want to perform ?</a:t>
             </a:r>
             <a:endParaRPr lang="en-GB" sz="1800" b="0" u="none" strike="noStrike">
               <a:solidFill>
